--- a/docs/Indus11-Final-Review.pptx
+++ b/docs/Indus11-Final-Review.pptx
@@ -31,9 +31,7 @@
     <p:sldId id="285" r:id="rId37"/>
     <p:sldId id="286" r:id="rId38"/>
     <p:sldId id="269" r:id="rId19"/>
-    <p:sldId id="270" r:id="rId20"/>
     <p:sldId id="265" r:id="rId21"/>
-    <p:sldId id="266" r:id="rId22"/>
     <p:sldId id="267" r:id="rId23"/>
     <p:sldId id="271" r:id="rId24"/>
     <p:sldId id="268" r:id="rId25"/>
@@ -5675,7 +5673,7 @@
 </p:sld>
 </file>
 
-<file path=ppt/slides/slide17.xml><?xml version="1.0" encoding="utf-8"?>
+<file path=ppt/slides/slide12.xml><?xml version="1.0" encoding="utf-8"?>
 <p:sld xmlns:a="http://schemas.openxmlformats.org/drawingml/2006/main" xmlns:r="http://schemas.openxmlformats.org/officeDocument/2006/relationships" xmlns:p="http://schemas.openxmlformats.org/presentationml/2006/main">
   <p:cSld>
     <p:spTree>
@@ -6438,7 +6436,7 @@
 </p:sld>
 </file>
 
-<file path=ppt/slides/slide18.xml><?xml version="1.0" encoding="utf-8"?>
+<file path=ppt/slides/slide13.xml><?xml version="1.0" encoding="utf-8"?>
 <p:sld xmlns:a="http://schemas.openxmlformats.org/drawingml/2006/main" xmlns:r="http://schemas.openxmlformats.org/officeDocument/2006/relationships" xmlns:p="http://schemas.openxmlformats.org/presentationml/2006/main">
   <p:cSld>
     <p:spTree>
@@ -6821,7 +6819,7 @@
 </p:sld>
 </file>
 
-<file path=ppt/slides/slide19.xml><?xml version="1.0" encoding="utf-8"?>
+<file path=ppt/slides/slide14.xml><?xml version="1.0" encoding="utf-8"?>
 <p:sld xmlns:a="http://schemas.openxmlformats.org/drawingml/2006/main" xmlns:r="http://schemas.openxmlformats.org/officeDocument/2006/relationships" xmlns:p="http://schemas.openxmlformats.org/presentationml/2006/main">
   <p:cSld>
     <p:spTree>
@@ -7750,287 +7748,7 @@
 </p:sld>
 </file>
 
-<file path=ppt/slides/slide2.xml><?xml version="1.0" encoding="utf-8"?>
-<p:sld xmlns:a="http://schemas.openxmlformats.org/drawingml/2006/main" xmlns:r="http://schemas.openxmlformats.org/officeDocument/2006/relationships" xmlns:p="http://schemas.openxmlformats.org/presentationml/2006/main">
-  <p:cSld>
-    <p:spTree>
-      <p:nvGrpSpPr>
-        <p:cNvPr id="1" name=""/>
-        <p:cNvGrpSpPr/>
-        <p:nvPr/>
-      </p:nvGrpSpPr>
-      <p:grpSpPr>
-        <a:xfrm>
-          <a:off x="0" y="0"/>
-          <a:ext cx="0" cy="0"/>
-          <a:chOff x="0" y="0"/>
-          <a:chExt cx="0" cy="0"/>
-        </a:xfrm>
-      </p:grpSpPr>
-      <p:sp>
-        <p:nvSpPr>
-          <p:cNvPr id="2" name="Title 1">
-            <a:extLst>
-              <a:ext uri="{FF2B5EF4-FFF2-40B4-BE49-F238E27FC236}">
-                <a16:creationId xmlns:a16="http://schemas.microsoft.com/office/drawing/2014/main" id="{5E288B20-417E-44A5-9E46-172FDC9DC3BA}"/>
-              </a:ext>
-            </a:extLst>
-          </p:cNvPr>
-          <p:cNvSpPr>
-            <a:spLocks noGrp="1"/>
-          </p:cNvSpPr>
-          <p:nvPr>
-            <p:ph type="title"/>
-          </p:nvPr>
-        </p:nvSpPr>
-        <p:spPr>
-          <a:xfrm>
-            <a:off x="8703" y="420580"/>
-            <a:ext cx="9880984" cy="791568"/>
-          </a:xfrm>
-        </p:spPr>
-        <p:txBody>
-          <a:bodyPr>
-            <a:normAutofit/>
-          </a:bodyPr>
-          <a:lstStyle/>
-          <a:p>
-            <a:r>
-              <a:rPr sz="2800" b="1">
-                <a:solidFill>
-                  <a:srgbClr val="002060"/>
-                </a:solidFill>
-                <a:latin typeface="Cambria"/>
-              </a:rPr>
-              <a:t>Outline of Presentation</a:t>
-            </a:r>
-          </a:p>
-        </p:txBody>
-      </p:sp>
-      <p:sp>
-        <p:nvSpPr>
-          <p:cNvPr id="7" name="Slide Number Placeholder 6">
-            <a:extLst>
-              <a:ext uri="{FF2B5EF4-FFF2-40B4-BE49-F238E27FC236}">
-                <a16:creationId xmlns:a16="http://schemas.microsoft.com/office/drawing/2014/main" id="{939229BD-8564-4A52-83BC-42D34CF41294}"/>
-              </a:ext>
-            </a:extLst>
-          </p:cNvPr>
-          <p:cNvSpPr>
-            <a:spLocks noGrp="1"/>
-          </p:cNvSpPr>
-          <p:nvPr>
-            <p:ph type="sldNum" sz="quarter" idx="12"/>
-          </p:nvPr>
-        </p:nvSpPr>
-        <p:spPr/>
-        <p:txBody>
-          <a:bodyPr/>
-          <a:lstStyle/>
-          <a:p>
-            <a:fld id="{AEC92F7B-3D78-491F-9E9D-356A40665CCC}" type="slidenum">
-              <a:rPr lang="en-IN" smtClean="0"/>
-              <a:t>2</a:t>
-            </a:fld>
-            <a:endParaRPr lang="en-IN" dirty="0"/>
-          </a:p>
-        </p:txBody>
-      </p:sp>
-      <p:sp>
-        <p:nvSpPr>
-          <p:cNvPr id="3" name="Rectangle 2">
-            <a:extLst>
-              <a:ext uri="{FF2B5EF4-FFF2-40B4-BE49-F238E27FC236}">
-                <a16:creationId xmlns:a16="http://schemas.microsoft.com/office/drawing/2014/main" id="{E59BD91F-2C4F-5429-F6E6-7C065ACACBC1}"/>
-              </a:ext>
-            </a:extLst>
-          </p:cNvPr>
-          <p:cNvSpPr/>
-          <p:nvPr/>
-        </p:nvSpPr>
-        <p:spPr>
-          <a:xfrm>
-            <a:off x="47309" y="1266921"/>
-            <a:ext cx="12070080" cy="5638800"/>
-          </a:xfrm>
-          <a:prstGeom prst="rect">
-            <a:avLst/>
-          </a:prstGeom>
-        </p:spPr>
-        <p:txBody>
-          <a:bodyPr wrap="square" anchor="t"/>
-          <a:lstStyle/>
-          <a:p>
-            <a:pPr lvl="0" algn="l">
-              <a:spcAft>
-                <a:spcPts val="1000"/>
-              </a:spcAft>
-            </a:pPr>
-            <a:r>
-              <a:rPr sz="2000" b="0" dirty="0">
-                <a:solidFill>
-                  <a:srgbClr val="222833"/>
-                </a:solidFill>
-                <a:latin typeface="Cambria"/>
-              </a:rPr>
-              <a:t>1.  Review Comments &amp; Actions (Proposal · Review 1 · Mid-Semester)</a:t>
-            </a:r>
-          </a:p>
-          <a:p>
-            <a:pPr>
-              <a:spcAft>
-                <a:spcPts val="1000"/>
-              </a:spcAft>
-            </a:pPr>
-            <a:r>
-              <a:rPr sz="2000" b="0" dirty="0">
-                <a:solidFill>
-                  <a:srgbClr val="222833"/>
-                </a:solidFill>
-                <a:latin typeface="Cambria"/>
-              </a:rPr>
-              <a:t>2.  Problem Statement &amp; Objectives</a:t>
-            </a:r>
-          </a:p>
-          <a:p>
-            <a:pPr>
-              <a:spcAft>
-                <a:spcPts val="1000"/>
-              </a:spcAft>
-            </a:pPr>
-            <a:r>
-              <a:rPr sz="2000" b="0" dirty="0">
-                <a:solidFill>
-                  <a:srgbClr val="222833"/>
-                </a:solidFill>
-                <a:latin typeface="Cambria"/>
-              </a:rPr>
-              <a:t>3.  System Architecture</a:t>
-            </a:r>
-          </a:p>
-          <a:p>
-            <a:pPr>
-              <a:spcAft>
-                <a:spcPts val="1000"/>
-              </a:spcAft>
-            </a:pPr>
-            <a:r>
-              <a:rPr sz="2000" b="0" dirty="0">
-                <a:solidFill>
-                  <a:srgbClr val="222833"/>
-                </a:solidFill>
-                <a:latin typeface="Cambria"/>
-              </a:rPr>
-              <a:t>4.  Process Flow / Data-Flow Diagram (DFD)</a:t>
-            </a:r>
-          </a:p>
-          <a:p>
-            <a:pPr>
-              <a:spcAft>
-                <a:spcPts val="1000"/>
-              </a:spcAft>
-            </a:pPr>
-            <a:r>
-              <a:rPr sz="2000" b="0" dirty="0">
-                <a:solidFill>
-                  <a:srgbClr val="222833"/>
-                </a:solidFill>
-                <a:latin typeface="Cambria"/>
-              </a:rPr>
-              <a:t>5.  Literature Review &amp; Existing Solutions</a:t>
-            </a:r>
-          </a:p>
-          <a:p>
-            <a:pPr>
-              <a:spcAft>
-                <a:spcPts val="1000"/>
-              </a:spcAft>
-            </a:pPr>
-            <a:r>
-              <a:rPr sz="2000" b="0" dirty="0">
-                <a:solidFill>
-                  <a:srgbClr val="222833"/>
-                </a:solidFill>
-                <a:latin typeface="Cambria"/>
-              </a:rPr>
-              <a:t>6.  Implementation Progress (Screenshots + Code)</a:t>
-            </a:r>
-          </a:p>
-          <a:p>
-            <a:pPr>
-              <a:spcAft>
-                <a:spcPts val="1000"/>
-              </a:spcAft>
-            </a:pPr>
-            <a:r>
-              <a:rPr sz="2000" b="0" dirty="0">
-                <a:solidFill>
-                  <a:srgbClr val="222833"/>
-                </a:solidFill>
-                <a:latin typeface="Cambria"/>
-              </a:rPr>
-              <a:t>7.  Challenges Faced &amp; Future Work</a:t>
-            </a:r>
-          </a:p>
-          <a:p>
-            <a:pPr>
-              <a:spcAft>
-                <a:spcPts val="1000"/>
-              </a:spcAft>
-            </a:pPr>
-            <a:r>
-              <a:rPr sz="2000" b="0" dirty="0">
-                <a:solidFill>
-                  <a:srgbClr val="222833"/>
-                </a:solidFill>
-                <a:latin typeface="Cambria"/>
-              </a:rPr>
-              <a:t>8.  Conclusion</a:t>
-            </a:r>
-          </a:p>
-          <a:p>
-            <a:pPr>
-              <a:spcAft>
-                <a:spcPts val="1000"/>
-              </a:spcAft>
-            </a:pPr>
-            <a:r>
-              <a:rPr sz="2000" b="0" dirty="0">
-                <a:solidFill>
-                  <a:srgbClr val="222833"/>
-                </a:solidFill>
-                <a:latin typeface="Cambria"/>
-              </a:rPr>
-              <a:t>9.  References</a:t>
-            </a:r>
-          </a:p>
-          <a:p>
-            <a:r>
-              <a:rPr sz="2000" b="0" dirty="0">
-                <a:solidFill>
-                  <a:srgbClr val="222833"/>
-                </a:solidFill>
-                <a:latin typeface="Cambria"/>
-              </a:rPr>
-              <a:t>10.  Team Contributions</a:t>
-            </a:r>
-          </a:p>
-        </p:txBody>
-      </p:sp>
-    </p:spTree>
-    <p:extLst>
-      <p:ext uri="{BB962C8B-B14F-4D97-AF65-F5344CB8AC3E}">
-        <p14:creationId xmlns:p14="http://schemas.microsoft.com/office/powerpoint/2010/main" val="866290265"/>
-      </p:ext>
-    </p:extLst>
-  </p:cSld>
-  <p:clrMapOvr>
-    <a:masterClrMapping/>
-  </p:clrMapOvr>
-</p:sld>
-</file>
-
-<file path=ppt/slides/slide20.xml><?xml version="1.0" encoding="utf-8"?>
+<file path=ppt/slides/slide15.xml><?xml version="1.0" encoding="utf-8"?>
 <p:sld xmlns:a="http://schemas.openxmlformats.org/drawingml/2006/main" xmlns:p="http://schemas.openxmlformats.org/presentationml/2006/main" xmlns:r="http://schemas.openxmlformats.org/officeDocument/2006/relationships">
   <p:cSld>
     <p:spTree>
@@ -8173,7 +7891,7 @@
 </p:sld>
 </file>
 
-<file path=ppt/slides/slide21.xml><?xml version="1.0" encoding="utf-8"?>
+<file path=ppt/slides/slide16.xml><?xml version="1.0" encoding="utf-8"?>
 <p:sld xmlns:a="http://schemas.openxmlformats.org/drawingml/2006/main" xmlns:p="http://schemas.openxmlformats.org/presentationml/2006/main" xmlns:r="http://schemas.openxmlformats.org/officeDocument/2006/relationships">
   <p:cSld>
     <p:spTree>
@@ -8316,7 +8034,7 @@
 </p:sld>
 </file>
 
-<file path=ppt/slides/slide22.xml><?xml version="1.0" encoding="utf-8"?>
+<file path=ppt/slides/slide17.xml><?xml version="1.0" encoding="utf-8"?>
 <p:sld xmlns:a="http://schemas.openxmlformats.org/drawingml/2006/main" xmlns:p="http://schemas.openxmlformats.org/presentationml/2006/main" xmlns:r="http://schemas.openxmlformats.org/officeDocument/2006/relationships">
   <p:cSld>
     <p:spTree>
@@ -8459,7 +8177,7 @@
 </p:sld>
 </file>
 
-<file path=ppt/slides/slide23.xml><?xml version="1.0" encoding="utf-8"?>
+<file path=ppt/slides/slide18.xml><?xml version="1.0" encoding="utf-8"?>
 <p:sld xmlns:a="http://schemas.openxmlformats.org/drawingml/2006/main" xmlns:p="http://schemas.openxmlformats.org/presentationml/2006/main" xmlns:r="http://schemas.openxmlformats.org/officeDocument/2006/relationships">
   <p:cSld>
     <p:spTree>
@@ -8602,7 +8320,7 @@
 </p:sld>
 </file>
 
-<file path=ppt/slides/slide24.xml><?xml version="1.0" encoding="utf-8"?>
+<file path=ppt/slides/slide19.xml><?xml version="1.0" encoding="utf-8"?>
 <p:sld xmlns:a="http://schemas.openxmlformats.org/drawingml/2006/main" xmlns:p="http://schemas.openxmlformats.org/presentationml/2006/main" xmlns:r="http://schemas.openxmlformats.org/officeDocument/2006/relationships">
   <p:cSld>
     <p:spTree>
@@ -8745,7 +8463,236 @@
 </p:sld>
 </file>
 
-<file path=ppt/slides/slide25.xml><?xml version="1.0" encoding="utf-8"?>
+<file path=ppt/slides/slide2.xml><?xml version="1.0" encoding="utf-8"?>
+<p:sld xmlns:a="http://schemas.openxmlformats.org/drawingml/2006/main" xmlns:r="http://schemas.openxmlformats.org/officeDocument/2006/relationships" xmlns:p="http://schemas.openxmlformats.org/presentationml/2006/main">
+  <p:cSld>
+    <p:spTree>
+      <p:nvGrpSpPr>
+        <p:cNvPr id="1" name=""/>
+        <p:cNvGrpSpPr/>
+        <p:nvPr/>
+      </p:nvGrpSpPr>
+      <p:grpSpPr>
+        <a:xfrm>
+          <a:off x="0" y="0"/>
+          <a:ext cx="0" cy="0"/>
+          <a:chOff x="0" y="0"/>
+          <a:chExt cx="0" cy="0"/>
+        </a:xfrm>
+      </p:grpSpPr>
+      <p:sp>
+        <p:nvSpPr>
+          <p:cNvPr id="2" name="Title 1">
+            <a:extLst>
+              <a:ext uri="{FF2B5EF4-FFF2-40B4-BE49-F238E27FC236}">
+                <a16:creationId xmlns:a16="http://schemas.microsoft.com/office/drawing/2014/main" id="{5E288B20-417E-44A5-9E46-172FDC9DC3BA}"/>
+              </a:ext>
+            </a:extLst>
+          </p:cNvPr>
+          <p:cNvSpPr>
+            <a:spLocks noGrp="1"/>
+          </p:cNvSpPr>
+          <p:nvPr>
+            <p:ph type="title"/>
+          </p:nvPr>
+        </p:nvSpPr>
+        <p:spPr>
+          <a:xfrm>
+            <a:off x="8703" y="420580"/>
+            <a:ext cx="9880984" cy="791568"/>
+          </a:xfrm>
+        </p:spPr>
+        <p:txBody>
+          <a:bodyPr>
+            <a:normAutofit/>
+          </a:bodyPr>
+          <a:lstStyle/>
+          <a:p>
+            <a:r>
+              <a:rPr sz="2800" b="1">
+                <a:solidFill>
+                  <a:srgbClr val="002060"/>
+                </a:solidFill>
+                <a:latin typeface="Cambria"/>
+              </a:rPr>
+              <a:t>Outline of Presentation</a:t>
+            </a:r>
+          </a:p>
+        </p:txBody>
+      </p:sp>
+      <p:sp>
+        <p:nvSpPr>
+          <p:cNvPr id="7" name="Slide Number Placeholder 6">
+            <a:extLst>
+              <a:ext uri="{FF2B5EF4-FFF2-40B4-BE49-F238E27FC236}">
+                <a16:creationId xmlns:a16="http://schemas.microsoft.com/office/drawing/2014/main" id="{939229BD-8564-4A52-83BC-42D34CF41294}"/>
+              </a:ext>
+            </a:extLst>
+          </p:cNvPr>
+          <p:cNvSpPr>
+            <a:spLocks noGrp="1"/>
+          </p:cNvSpPr>
+          <p:nvPr>
+            <p:ph type="sldNum" sz="quarter" idx="12"/>
+          </p:nvPr>
+        </p:nvSpPr>
+        <p:spPr/>
+        <p:txBody>
+          <a:bodyPr/>
+          <a:lstStyle/>
+          <a:p>
+            <a:fld id="{AEC92F7B-3D78-491F-9E9D-356A40665CCC}" type="slidenum">
+              <a:rPr lang="en-IN" smtClean="0"/>
+              <a:t>2</a:t>
+            </a:fld>
+            <a:endParaRPr lang="en-IN" dirty="0"/>
+          </a:p>
+        </p:txBody>
+      </p:sp>
+      <p:sp>
+        <p:nvSpPr>
+          <p:cNvPr id="3" name="Rectangle 2">
+            <a:extLst>
+              <a:ext uri="{FF2B5EF4-FFF2-40B4-BE49-F238E27FC236}">
+                <a16:creationId xmlns:a16="http://schemas.microsoft.com/office/drawing/2014/main" id="{E59BD91F-2C4F-5429-F6E6-7C065ACACBC1}"/>
+              </a:ext>
+            </a:extLst>
+          </p:cNvPr>
+          <p:cNvSpPr/>
+          <p:nvPr/>
+        </p:nvSpPr>
+        <p:spPr>
+          <a:xfrm>
+            <a:off x="47309" y="1266921"/>
+            <a:ext cx="12070080" cy="5638800"/>
+          </a:xfrm>
+          <a:prstGeom prst="rect">
+            <a:avLst/>
+          </a:prstGeom>
+        </p:spPr>
+        <p:txBody>
+          <a:bodyPr wrap="square" anchor="t"/>
+          <a:lstStyle/>
+          <a:p>
+            <a:pPr lvl="0" algn="l">
+              <a:spcAft>
+                <a:spcPts val="1000"/>
+              </a:spcAft>
+            </a:pPr>
+            <a:r>
+              <a:rPr sz="2000">
+                <a:solidFill>
+                  <a:srgbClr val="222833"/>
+                </a:solidFill>
+                <a:latin typeface="Cambria"/>
+              </a:rPr>
+              <a:t>1.  Review Comments &amp; Actions (Proposal · Review 1 · Mid-Semester)</a:t>
+            </a:r>
+          </a:p>
+          <a:p>
+            <a:r>
+              <a:rPr sz="2000">
+                <a:solidFill>
+                  <a:srgbClr val="222833"/>
+                </a:solidFill>
+                <a:latin typeface="Cambria"/>
+              </a:rPr>
+              <a:t>2.  Problem Statement &amp; Objectives</a:t>
+            </a:r>
+          </a:p>
+          <a:p>
+            <a:r>
+              <a:rPr sz="2000">
+                <a:solidFill>
+                  <a:srgbClr val="222833"/>
+                </a:solidFill>
+                <a:latin typeface="Cambria"/>
+              </a:rPr>
+              <a:t>3.  System Architecture</a:t>
+            </a:r>
+          </a:p>
+          <a:p>
+            <a:r>
+              <a:rPr sz="2000">
+                <a:solidFill>
+                  <a:srgbClr val="222833"/>
+                </a:solidFill>
+                <a:latin typeface="Cambria"/>
+              </a:rPr>
+              <a:t>4.  Process Flow / Data-Flow Diagram (DFD)</a:t>
+            </a:r>
+          </a:p>
+          <a:p>
+            <a:r>
+              <a:rPr sz="2000">
+                <a:solidFill>
+                  <a:srgbClr val="222833"/>
+                </a:solidFill>
+                <a:latin typeface="Cambria"/>
+              </a:rPr>
+              <a:t>5.  Literature Review &amp; Existing Solutions</a:t>
+            </a:r>
+          </a:p>
+          <a:p>
+            <a:r>
+              <a:rPr sz="2000">
+                <a:solidFill>
+                  <a:srgbClr val="222833"/>
+                </a:solidFill>
+                <a:latin typeface="Cambria"/>
+              </a:rPr>
+              <a:t>6.  Implementation Progress (Screenshots + Code)</a:t>
+            </a:r>
+          </a:p>
+          <a:p>
+            <a:r>
+              <a:rPr sz="2000">
+                <a:solidFill>
+                  <a:srgbClr val="222833"/>
+                </a:solidFill>
+                <a:latin typeface="Cambria"/>
+              </a:rPr>
+              <a:t>7.  Challenges Faced &amp; Future Work</a:t>
+            </a:r>
+          </a:p>
+          <a:p>
+            <a:r>
+              <a:rPr sz="2000">
+                <a:solidFill>
+                  <a:srgbClr val="222833"/>
+                </a:solidFill>
+                <a:latin typeface="Cambria"/>
+              </a:rPr>
+              <a:t>8.  References</a:t>
+            </a:r>
+          </a:p>
+          <a:p>
+            <a:r>
+              <a:rPr sz="2000">
+                <a:solidFill>
+                  <a:srgbClr val="222833"/>
+                </a:solidFill>
+                <a:latin typeface="Cambria"/>
+              </a:rPr>
+              <a:t>9.  Team Contributions</a:t>
+            </a:r>
+          </a:p>
+        </p:txBody>
+      </p:sp>
+    </p:spTree>
+    <p:extLst>
+      <p:ext uri="{BB962C8B-B14F-4D97-AF65-F5344CB8AC3E}">
+        <p14:creationId xmlns:p14="http://schemas.microsoft.com/office/powerpoint/2010/main" val="866290265"/>
+      </p:ext>
+    </p:extLst>
+  </p:cSld>
+  <p:clrMapOvr>
+    <a:masterClrMapping/>
+  </p:clrMapOvr>
+</p:sld>
+</file>
+
+<file path=ppt/slides/slide20.xml><?xml version="1.0" encoding="utf-8"?>
 <p:sld xmlns:a="http://schemas.openxmlformats.org/drawingml/2006/main" xmlns:r="http://schemas.openxmlformats.org/officeDocument/2006/relationships" xmlns:p="http://schemas.openxmlformats.org/presentationml/2006/main">
   <p:cSld>
     <p:spTree>
@@ -9601,7 +9548,7 @@
 </p:sld>
 </file>
 
-<file path=ppt/slides/slide26.xml><?xml version="1.0" encoding="utf-8"?>
+<file path=ppt/slides/slide22.xml><?xml version="1.0" encoding="utf-8"?>
 <p:sld xmlns:a="http://schemas.openxmlformats.org/drawingml/2006/main" xmlns:r="http://schemas.openxmlformats.org/officeDocument/2006/relationships" xmlns:p="http://schemas.openxmlformats.org/presentationml/2006/main">
   <p:cSld>
     <p:spTree>
@@ -9640,7 +9587,7 @@
                 </a:solidFill>
                 <a:latin typeface="Cambria"/>
               </a:rPr>
-              <a:t>Progress Since the Last Review</a:t>
+              <a:t>Challenges Faced &amp; Future Work</a:t>
             </a:r>
           </a:p>
         </p:txBody>
@@ -9668,17 +9615,17 @@
             <a:r>
               <a:rPr sz="1800" b="1">
                 <a:solidFill>
-                  <a:srgbClr val="002060"/>
-                </a:solidFill>
-                <a:latin typeface="Cambria"/>
-              </a:rPr>
-              <a:t>Specification</a:t>
+                  <a:srgbClr val="B26A00"/>
+                </a:solidFill>
+                <a:latin typeface="Cambria"/>
+              </a:rPr>
+              <a:t>Challenges faced</a:t>
             </a:r>
           </a:p>
           <a:p>
             <a:pPr lvl="1">
               <a:spcAft>
-                <a:spcPts val="500"/>
+                <a:spcPts val="400"/>
               </a:spcAft>
             </a:pPr>
             <a:r>
@@ -9688,13 +9635,13 @@
                 </a:solidFill>
                 <a:latin typeface="Cambria"/>
               </a:rPr>
-              <a:t>Front matter numbered in roman (i-ix); body restarts at 1</a:t>
+              <a:t>Coordinating four data stores on one machine</a:t>
             </a:r>
           </a:p>
           <a:p>
             <a:pPr lvl="1">
               <a:spcAft>
-                <a:spcPts val="500"/>
+                <a:spcPts val="400"/>
               </a:spcAft>
             </a:pPr>
             <a:r>
@@ -9704,13 +9651,13 @@
                 </a:solidFill>
                 <a:latin typeface="Cambria"/>
               </a:rPr>
-              <a:t>Every reference cited in the text at its point of use, IEEE style</a:t>
+              <a:t>Keeping model output consistent — solved with a 30-point cap</a:t>
             </a:r>
           </a:p>
           <a:p>
             <a:pPr lvl="1">
               <a:spcAft>
-                <a:spcPts val="500"/>
+                <a:spcPts val="400"/>
               </a:spcAft>
             </a:pPr>
             <a:r>
@@ -9720,13 +9667,13 @@
                 </a:solidFill>
                 <a:latin typeface="Cambria"/>
               </a:rPr>
-              <a:t>Tables restyled — caption above, columns sized to content, none split across a page break</a:t>
+              <a:t>Writing Cypher queries for circular money-mule flows</a:t>
             </a:r>
           </a:p>
           <a:p>
             <a:pPr lvl="1">
               <a:spcAft>
-                <a:spcPts val="500"/>
+                <a:spcPts val="400"/>
               </a:spcAft>
             </a:pPr>
             <a:r>
@@ -9736,13 +9683,13 @@
                 </a:solidFill>
                 <a:latin typeface="Cambria"/>
               </a:rPr>
-              <a:t>32 functional requirements consolidated to 28 real, distinct ones</a:t>
+              <a:t>Two defects the benchmark exposed: a repeated request returned</a:t>
             </a:r>
           </a:p>
           <a:p>
             <a:pPr lvl="1">
               <a:spcAft>
-                <a:spcPts val="500"/>
+                <a:spcPts val="400"/>
               </a:spcAft>
             </a:pPr>
             <a:r>
@@ -9752,7 +9699,23 @@
                 </a:solidFill>
                 <a:latin typeface="Cambria"/>
               </a:rPr>
-              <a:t>Diagram set re-checked against the guide's notation comments and against the running code</a:t>
+              <a:t>a server error, and a parsing fault silently zeroed the AI</a:t>
+            </a:r>
+          </a:p>
+          <a:p>
+            <a:pPr lvl="1">
+              <a:spcAft>
+                <a:spcPts val="400"/>
+              </a:spcAft>
+            </a:pPr>
+            <a:r>
+              <a:rPr sz="1600" b="0">
+                <a:solidFill>
+                  <a:srgbClr val="222833"/>
+                </a:solidFill>
+                <a:latin typeface="Cambria"/>
+              </a:rPr>
+              <a:t>score — both fixed and covered by tests</a:t>
             </a:r>
           </a:p>
         </p:txBody>
@@ -9780,17 +9743,17 @@
             <a:r>
               <a:rPr sz="1800" b="1">
                 <a:solidFill>
-                  <a:srgbClr val="028090"/>
-                </a:solidFill>
-                <a:latin typeface="Cambria"/>
-              </a:rPr>
-              <a:t>Product</a:t>
+                  <a:srgbClr val="2E7D32"/>
+                </a:solidFill>
+                <a:latin typeface="Cambria"/>
+              </a:rPr>
+              <a:t>Future work</a:t>
             </a:r>
           </a:p>
           <a:p>
             <a:pPr lvl="1">
               <a:spcAft>
-                <a:spcPts val="500"/>
+                <a:spcPts val="400"/>
               </a:spcAft>
             </a:pPr>
             <a:r>
@@ -9800,13 +9763,13 @@
                 </a:solidFill>
                 <a:latin typeface="Cambria"/>
               </a:rPr>
-              <a:t>Flagged-transactions table made interactive — filters, search, sortable columns</a:t>
+              <a:t>Resolve the block-threshold trade-off from recorded scores</a:t>
             </a:r>
           </a:p>
           <a:p>
             <a:pPr lvl="1">
               <a:spcAft>
-                <a:spcPts val="500"/>
+                <a:spcPts val="400"/>
               </a:spcAft>
             </a:pPr>
             <a:r>
@@ -9816,13 +9779,13 @@
                 </a:solidFill>
                 <a:latin typeface="Cambria"/>
               </a:rPr>
-              <a:t>Entrance and count-up motion, with an automatic reduced-motion fallback</a:t>
+              <a:t>Add API authentication and request logging</a:t>
             </a:r>
           </a:p>
           <a:p>
             <a:pPr lvl="1">
               <a:spcAft>
-                <a:spcPts val="500"/>
+                <a:spcPts val="400"/>
               </a:spcAft>
             </a:pPr>
             <a:r>
@@ -9832,13 +9795,13 @@
                 </a:solidFill>
                 <a:latin typeface="Cambria"/>
               </a:rPr>
-              <a:t>Static demo mode: the dashboard runs from a snapshot with no live backend</a:t>
+              <a:t>Fraud-ring visualisation on the graph endpoint</a:t>
             </a:r>
           </a:p>
           <a:p>
             <a:pPr lvl="1">
               <a:spcAft>
-                <a:spcPts val="500"/>
+                <a:spcPts val="400"/>
               </a:spcAft>
             </a:pPr>
             <a:r>
@@ -9848,7 +9811,73 @@
                 </a:solidFill>
                 <a:latin typeface="Cambria"/>
               </a:rPr>
-              <a:t>Weekly-report generator with an automatic duplicate-reference check across weeks</a:t>
+              <a:t>Investigate the 7 undetected frauds; fan-in / fan-out patterns</a:t>
+            </a:r>
+          </a:p>
+          <a:p>
+            <a:pPr lvl="1">
+              <a:spcAft>
+                <a:spcPts val="400"/>
+              </a:spcAft>
+            </a:pPr>
+            <a:r>
+              <a:rPr sz="1600" b="0">
+                <a:solidFill>
+                  <a:srgbClr val="222833"/>
+                </a:solidFill>
+                <a:latin typeface="Cambria"/>
+              </a:rPr>
+              <a:t>Train a supervised classifier as a fourth signal</a:t>
+            </a:r>
+          </a:p>
+          <a:p>
+            <a:pPr lvl="1">
+              <a:spcAft>
+                <a:spcPts val="400"/>
+              </a:spcAft>
+            </a:pPr>
+            <a:r>
+              <a:rPr sz="1600" b="0">
+                <a:solidFill>
+                  <a:srgbClr val="222833"/>
+                </a:solidFill>
+                <a:latin typeface="Cambria"/>
+              </a:rPr>
+              <a:t>Reduce latency, presently dominated by the local model</a:t>
+            </a:r>
+          </a:p>
+        </p:txBody>
+      </p:sp>
+      <p:sp>
+        <p:nvSpPr>
+          <p:cNvPr id="5" name="TextBox 4"/>
+          <p:cNvSpPr txBox="1"/>
+          <p:nvPr/>
+        </p:nvSpPr>
+        <p:spPr>
+          <a:xfrm>
+            <a:off x="18288" y="109728"/>
+            <a:ext cx="8229600" cy="292608"/>
+          </a:xfrm>
+          <a:prstGeom prst="rect">
+            <a:avLst/>
+          </a:prstGeom>
+          <a:noFill/>
+        </p:spPr>
+        <p:txBody>
+          <a:bodyPr wrap="none">
+            <a:spAutoFit/>
+          </a:bodyPr>
+          <a:lstStyle/>
+          <a:p>
+            <a:r>
+              <a:rPr sz="1100" b="1">
+                <a:solidFill>
+                  <a:srgbClr val="028090"/>
+                </a:solidFill>
+                <a:latin typeface="Cambria"/>
+              </a:rPr>
+              <a:t>07 · CHALLENGES &amp; FUTURE WORK</a:t>
             </a:r>
           </a:p>
         </p:txBody>
@@ -9861,7 +9890,7 @@
 </p:sld>
 </file>
 
-<file path=ppt/slides/slide27.xml><?xml version="1.0" encoding="utf-8"?>
+<file path=ppt/slides/slide24.xml><?xml version="1.0" encoding="utf-8"?>
 <p:sld xmlns:a="http://schemas.openxmlformats.org/drawingml/2006/main" xmlns:r="http://schemas.openxmlformats.org/officeDocument/2006/relationships" xmlns:p="http://schemas.openxmlformats.org/presentationml/2006/main">
   <p:cSld>
     <p:spTree>
@@ -9900,7 +9929,7 @@
                 </a:solidFill>
                 <a:latin typeface="Cambria"/>
               </a:rPr>
-              <a:t>Challenges Faced &amp; Future Work</a:t>
+              <a:t>References</a:t>
             </a:r>
           </a:p>
         </p:txBody>
@@ -9912,7 +9941,7 @@
             <a:spLocks noGrp="1"/>
           </p:cNvSpPr>
           <p:nvPr>
-            <p:ph sz="half" idx="1"/>
+            <p:ph idx="1"/>
           </p:nvPr>
         </p:nvSpPr>
         <p:spPr/>
@@ -9926,127 +9955,15 @@
               </a:spcAft>
             </a:pPr>
             <a:r>
-              <a:rPr sz="1800" b="1">
-                <a:solidFill>
-                  <a:srgbClr val="B26A00"/>
-                </a:solidFill>
-                <a:latin typeface="Cambria"/>
-              </a:rPr>
-              <a:t>Challenges faced</a:t>
-            </a:r>
-          </a:p>
-          <a:p>
-            <a:pPr lvl="1">
-              <a:spcAft>
-                <a:spcPts val="400"/>
-              </a:spcAft>
-            </a:pPr>
-            <a:r>
-              <a:rPr sz="1600" b="0">
-                <a:solidFill>
-                  <a:srgbClr val="222833"/>
-                </a:solidFill>
-                <a:latin typeface="Cambria"/>
-              </a:rPr>
-              <a:t>Coordinating four data stores on one machine</a:t>
-            </a:r>
-          </a:p>
-          <a:p>
-            <a:pPr lvl="1">
-              <a:spcAft>
-                <a:spcPts val="400"/>
-              </a:spcAft>
-            </a:pPr>
-            <a:r>
-              <a:rPr sz="1600" b="0">
-                <a:solidFill>
-                  <a:srgbClr val="222833"/>
-                </a:solidFill>
-                <a:latin typeface="Cambria"/>
-              </a:rPr>
-              <a:t>Keeping model output consistent — solved with a 30-point cap</a:t>
-            </a:r>
-          </a:p>
-          <a:p>
-            <a:pPr lvl="1">
-              <a:spcAft>
-                <a:spcPts val="400"/>
-              </a:spcAft>
-            </a:pPr>
-            <a:r>
-              <a:rPr sz="1600" b="0">
-                <a:solidFill>
-                  <a:srgbClr val="222833"/>
-                </a:solidFill>
-                <a:latin typeface="Cambria"/>
-              </a:rPr>
-              <a:t>Writing Cypher queries for circular money-mule flows</a:t>
-            </a:r>
-          </a:p>
-          <a:p>
-            <a:pPr lvl="1">
-              <a:spcAft>
-                <a:spcPts val="400"/>
-              </a:spcAft>
-            </a:pPr>
-            <a:r>
-              <a:rPr sz="1600" b="0">
-                <a:solidFill>
-                  <a:srgbClr val="222833"/>
-                </a:solidFill>
-                <a:latin typeface="Cambria"/>
-              </a:rPr>
-              <a:t>Two defects the benchmark exposed: a repeated request returned</a:t>
-            </a:r>
-          </a:p>
-          <a:p>
-            <a:pPr lvl="1">
-              <a:spcAft>
-                <a:spcPts val="400"/>
-              </a:spcAft>
-            </a:pPr>
-            <a:r>
-              <a:rPr sz="1600" b="0">
-                <a:solidFill>
-                  <a:srgbClr val="222833"/>
-                </a:solidFill>
-                <a:latin typeface="Cambria"/>
-              </a:rPr>
-              <a:t>a server error, and a parsing fault silently zeroed the AI</a:t>
-            </a:r>
-          </a:p>
-          <a:p>
-            <a:pPr lvl="1">
-              <a:spcAft>
-                <a:spcPts val="400"/>
-              </a:spcAft>
-            </a:pPr>
-            <a:r>
-              <a:rPr sz="1600" b="0">
-                <a:solidFill>
-                  <a:srgbClr val="222833"/>
-                </a:solidFill>
-                <a:latin typeface="Cambria"/>
-              </a:rPr>
-              <a:t>score — both fixed and covered by tests</a:t>
-            </a:r>
-          </a:p>
-        </p:txBody>
-      </p:sp>
-      <p:sp>
-        <p:nvSpPr>
-          <p:cNvPr id="4" name="Content Placeholder 3"/>
-          <p:cNvSpPr>
-            <a:spLocks noGrp="1"/>
-          </p:cNvSpPr>
-          <p:nvPr>
-            <p:ph sz="half" idx="2"/>
-          </p:nvPr>
-        </p:nvSpPr>
-        <p:spPr/>
-        <p:txBody>
-          <a:bodyPr wrap="square"/>
-          <a:lstStyle/>
+              <a:rPr sz="1300" b="0">
+                <a:solidFill>
+                  <a:srgbClr val="222833"/>
+                </a:solidFill>
+                <a:latin typeface="Cambria"/>
+              </a:rPr>
+              <a:t>[1]  Van Vlasselaer, V. et al. (2015). APATE: A novel approach for automated credit card transaction fraud detection using network-based extensions. Decision Support Systems, 75, 38–48.</a:t>
+            </a:r>
+          </a:p>
           <a:p>
             <a:pPr>
               <a:spcAft>
@@ -10054,143 +9971,77 @@
               </a:spcAft>
             </a:pPr>
             <a:r>
-              <a:rPr sz="1800" b="1">
-                <a:solidFill>
-                  <a:srgbClr val="2E7D32"/>
-                </a:solidFill>
-                <a:latin typeface="Cambria"/>
-              </a:rPr>
-              <a:t>Future work</a:t>
-            </a:r>
-          </a:p>
-          <a:p>
-            <a:pPr lvl="1">
+              <a:rPr sz="1300" b="0">
+                <a:solidFill>
+                  <a:srgbClr val="222833"/>
+                </a:solidFill>
+                <a:latin typeface="Cambria"/>
+              </a:rPr>
+              <a:t>[2]  FICO. Falcon Fraud Manager — product documentation. fico.com.</a:t>
+            </a:r>
+          </a:p>
+          <a:p>
+            <a:pPr>
               <a:spcAft>
-                <a:spcPts val="400"/>
+                <a:spcPts val="700"/>
               </a:spcAft>
             </a:pPr>
             <a:r>
-              <a:rPr sz="1600" b="0">
-                <a:solidFill>
-                  <a:srgbClr val="222833"/>
-                </a:solidFill>
-                <a:latin typeface="Cambria"/>
-              </a:rPr>
-              <a:t>Resolve the block-threshold trade-off from recorded scores</a:t>
-            </a:r>
-          </a:p>
-          <a:p>
-            <a:pPr lvl="1">
+              <a:rPr sz="1300" b="0">
+                <a:solidFill>
+                  <a:srgbClr val="222833"/>
+                </a:solidFill>
+                <a:latin typeface="Cambria"/>
+              </a:rPr>
+              <a:t>[3]  Feedzai. RiskOps platform overview. feedzai.com.</a:t>
+            </a:r>
+          </a:p>
+          <a:p>
+            <a:pPr>
               <a:spcAft>
-                <a:spcPts val="400"/>
+                <a:spcPts val="700"/>
               </a:spcAft>
             </a:pPr>
             <a:r>
-              <a:rPr sz="1600" b="0">
-                <a:solidFill>
-                  <a:srgbClr val="222833"/>
-                </a:solidFill>
-                <a:latin typeface="Cambria"/>
-              </a:rPr>
-              <a:t>Add API authentication and request logging</a:t>
-            </a:r>
-          </a:p>
-          <a:p>
-            <a:pPr lvl="1">
+              <a:rPr sz="1300" b="0">
+                <a:solidFill>
+                  <a:srgbClr val="222833"/>
+                </a:solidFill>
+                <a:latin typeface="Cambria"/>
+              </a:rPr>
+              <a:t>[4]  Featurespace. ARIC Risk Hub — adaptive behavioural analytics. featurespace.com.</a:t>
+            </a:r>
+          </a:p>
+          <a:p>
+            <a:pPr>
               <a:spcAft>
-                <a:spcPts val="400"/>
+                <a:spcPts val="700"/>
               </a:spcAft>
             </a:pPr>
             <a:r>
-              <a:rPr sz="1600" b="0">
-                <a:solidFill>
-                  <a:srgbClr val="222833"/>
-                </a:solidFill>
-                <a:latin typeface="Cambria"/>
-              </a:rPr>
-              <a:t>Fraud-ring visualisation on the graph endpoint</a:t>
-            </a:r>
-          </a:p>
-          <a:p>
-            <a:pPr lvl="1">
+              <a:rPr sz="1300" b="0">
+                <a:solidFill>
+                  <a:srgbClr val="222833"/>
+                </a:solidFill>
+                <a:latin typeface="Cambria"/>
+              </a:rPr>
+              <a:t>[5]  Neo4j. Graph algorithms for fraud detection — developer guide. neo4j.com.</a:t>
+            </a:r>
+          </a:p>
+          <a:p>
+            <a:pPr>
               <a:spcAft>
-                <a:spcPts val="400"/>
+                <a:spcPts val="700"/>
               </a:spcAft>
             </a:pPr>
             <a:r>
-              <a:rPr sz="1600" b="0">
-                <a:solidFill>
-                  <a:srgbClr val="222833"/>
-                </a:solidFill>
-                <a:latin typeface="Cambria"/>
-              </a:rPr>
-              <a:t>Investigate the 7 undetected frauds; fan-in / fan-out patterns</a:t>
-            </a:r>
-          </a:p>
-          <a:p>
-            <a:pPr lvl="1">
-              <a:spcAft>
-                <a:spcPts val="400"/>
-              </a:spcAft>
-            </a:pPr>
-            <a:r>
-              <a:rPr sz="1600" b="0">
-                <a:solidFill>
-                  <a:srgbClr val="222833"/>
-                </a:solidFill>
-                <a:latin typeface="Cambria"/>
-              </a:rPr>
-              <a:t>Train a supervised classifier as a fourth signal</a:t>
-            </a:r>
-          </a:p>
-          <a:p>
-            <a:pPr lvl="1">
-              <a:spcAft>
-                <a:spcPts val="400"/>
-              </a:spcAft>
-            </a:pPr>
-            <a:r>
-              <a:rPr sz="1600" b="0">
-                <a:solidFill>
-                  <a:srgbClr val="222833"/>
-                </a:solidFill>
-                <a:latin typeface="Cambria"/>
-              </a:rPr>
-              <a:t>Reduce latency, presently dominated by the local model</a:t>
-            </a:r>
-          </a:p>
-        </p:txBody>
-      </p:sp>
-      <p:sp>
-        <p:nvSpPr>
-          <p:cNvPr id="5" name="TextBox 4"/>
-          <p:cNvSpPr txBox="1"/>
-          <p:nvPr/>
-        </p:nvSpPr>
-        <p:spPr>
-          <a:xfrm>
-            <a:off x="18288" y="109728"/>
-            <a:ext cx="8229600" cy="292608"/>
-          </a:xfrm>
-          <a:prstGeom prst="rect">
-            <a:avLst/>
-          </a:prstGeom>
-          <a:noFill/>
-        </p:spPr>
-        <p:txBody>
-          <a:bodyPr wrap="none">
-            <a:spAutoFit/>
-          </a:bodyPr>
-          <a:lstStyle/>
-          <a:p>
-            <a:r>
-              <a:rPr sz="1100" b="1">
-                <a:solidFill>
-                  <a:srgbClr val="028090"/>
-                </a:solidFill>
-                <a:latin typeface="Cambria"/>
-              </a:rPr>
-              <a:t>07 · CHALLENGES &amp; FUTURE WORK</a:t>
+              <a:rPr sz="1300" b="0">
+                <a:solidFill>
+                  <a:srgbClr val="222833"/>
+                </a:solidFill>
+                <a:latin typeface="Cambria"/>
+              </a:rPr>
+              <a:t>[6]  LangChain &amp; ChromaDB documentation — retrieval-augmented generation.</a:t>
             </a:r>
           </a:p>
         </p:txBody>
@@ -10203,873 +10054,7 @@
 </p:sld>
 </file>
 
-<file path=ppt/slides/slide28.xml><?xml version="1.0" encoding="utf-8"?>
-<p:sld xmlns:a="http://schemas.openxmlformats.org/drawingml/2006/main" xmlns:r="http://schemas.openxmlformats.org/officeDocument/2006/relationships" xmlns:p="http://schemas.openxmlformats.org/presentationml/2006/main">
-  <p:cSld>
-    <p:spTree>
-      <p:nvGrpSpPr>
-        <p:cNvPr id="1" name=""/>
-        <p:cNvGrpSpPr/>
-        <p:nvPr/>
-      </p:nvGrpSpPr>
-      <p:grpSpPr>
-        <a:xfrm>
-          <a:off x="0" y="0"/>
-          <a:ext cx="0" cy="0"/>
-          <a:chOff x="0" y="0"/>
-          <a:chExt cx="0" cy="0"/>
-        </a:xfrm>
-      </p:grpSpPr>
-      <p:sp>
-        <p:nvSpPr>
-          <p:cNvPr id="2" name="Title 1"/>
-          <p:cNvSpPr>
-            <a:spLocks noGrp="1"/>
-          </p:cNvSpPr>
-          <p:nvPr>
-            <p:ph type="title"/>
-          </p:nvPr>
-        </p:nvSpPr>
-        <p:spPr/>
-        <p:txBody>
-          <a:bodyPr/>
-          <a:lstStyle/>
-          <a:p>
-            <a:r>
-              <a:rPr sz="2800" b="1">
-                <a:solidFill>
-                  <a:srgbClr val="002060"/>
-                </a:solidFill>
-                <a:latin typeface="Cambria"/>
-              </a:rPr>
-              <a:t>Conclusion — Where the Project Stands</a:t>
-            </a:r>
-          </a:p>
-        </p:txBody>
-      </p:sp>
-      <p:sp>
-        <p:nvSpPr>
-          <p:cNvPr id="3" name="Rounded Rectangle 2"/>
-          <p:cNvSpPr/>
-          <p:nvPr/>
-        </p:nvSpPr>
-        <p:spPr>
-          <a:xfrm>
-            <a:off x="457200" y="1828800"/>
-            <a:ext cx="2743200" cy="2834640"/>
-          </a:xfrm>
-          <a:prstGeom prst="roundRect">
-            <a:avLst/>
-          </a:prstGeom>
-          <a:solidFill>
-            <a:srgbClr val="F4F6FA"/>
-          </a:solidFill>
-          <a:ln>
-            <a:solidFill>
-              <a:srgbClr val="C7D0DE"/>
-            </a:solidFill>
-          </a:ln>
-          <a:effectLst/>
-        </p:spPr>
-        <p:style>
-          <a:lnRef idx="1">
-            <a:schemeClr val="accent1"/>
-          </a:lnRef>
-          <a:fillRef idx="3">
-            <a:schemeClr val="accent1"/>
-          </a:fillRef>
-          <a:effectRef idx="2">
-            <a:schemeClr val="accent1"/>
-          </a:effectRef>
-          <a:fontRef idx="minor">
-            <a:schemeClr val="lt1"/>
-          </a:fontRef>
-        </p:style>
-        <p:txBody>
-          <a:bodyPr wrap="square" lIns="146304" tIns="182880" rIns="128016" rtlCol="0" anchor="ctr"/>
-          <a:lstStyle/>
-          <a:p>
-            <a:pPr algn="ctr">
-              <a:spcAft>
-                <a:spcPts val="800"/>
-              </a:spcAft>
-            </a:pPr>
-            <a:r>
-              <a:rPr sz="1400" b="1">
-                <a:solidFill>
-                  <a:srgbClr val="002060"/>
-                </a:solidFill>
-                <a:latin typeface="Cambria"/>
-              </a:rPr>
-              <a:t>Measured, not asserted</a:t>
-            </a:r>
-          </a:p>
-          <a:p>
-            <a:pPr>
-              <a:spcAft>
-                <a:spcPts val="800"/>
-              </a:spcAft>
-            </a:pPr>
-            <a:r>
-              <a:rPr sz="1200" b="0">
-                <a:solidFill>
-                  <a:srgbClr val="222833"/>
-                </a:solidFill>
-                <a:latin typeface="Cambria"/>
-              </a:rPr>
-              <a:t>96.3% precision, 100% recall, F1 0.98 on 208 labelled transactions.</a:t>
-            </a:r>
-          </a:p>
-        </p:txBody>
-      </p:sp>
-      <p:sp>
-        <p:nvSpPr>
-          <p:cNvPr id="4" name="Rounded Rectangle 3"/>
-          <p:cNvSpPr/>
-          <p:nvPr/>
-        </p:nvSpPr>
-        <p:spPr>
-          <a:xfrm>
-            <a:off x="3447288" y="1828800"/>
-            <a:ext cx="2743200" cy="2834640"/>
-          </a:xfrm>
-          <a:prstGeom prst="roundRect">
-            <a:avLst/>
-          </a:prstGeom>
-          <a:solidFill>
-            <a:srgbClr val="F4F6FA"/>
-          </a:solidFill>
-          <a:ln>
-            <a:solidFill>
-              <a:srgbClr val="C7D0DE"/>
-            </a:solidFill>
-          </a:ln>
-          <a:effectLst/>
-        </p:spPr>
-        <p:style>
-          <a:lnRef idx="1">
-            <a:schemeClr val="accent1"/>
-          </a:lnRef>
-          <a:fillRef idx="3">
-            <a:schemeClr val="accent1"/>
-          </a:fillRef>
-          <a:effectRef idx="2">
-            <a:schemeClr val="accent1"/>
-          </a:effectRef>
-          <a:fontRef idx="minor">
-            <a:schemeClr val="lt1"/>
-          </a:fontRef>
-        </p:style>
-        <p:txBody>
-          <a:bodyPr wrap="square" lIns="146304" tIns="182880" rIns="128016" rtlCol="0" anchor="ctr"/>
-          <a:lstStyle/>
-          <a:p>
-            <a:pPr algn="ctr">
-              <a:spcAft>
-                <a:spcPts val="800"/>
-              </a:spcAft>
-            </a:pPr>
-            <a:r>
-              <a:rPr sz="1400" b="1">
-                <a:solidFill>
-                  <a:srgbClr val="028090"/>
-                </a:solidFill>
-                <a:latin typeface="Cambria"/>
-              </a:rPr>
-              <a:t>The graph layer earns its place</a:t>
-            </a:r>
-          </a:p>
-          <a:p>
-            <a:pPr>
-              <a:spcAft>
-                <a:spcPts val="800"/>
-              </a:spcAft>
-            </a:pPr>
-            <a:r>
-              <a:rPr sz="1200" b="0">
-                <a:solidFill>
-                  <a:srgbClr val="222833"/>
-                </a:solidFill>
-                <a:latin typeface="Cambria"/>
-              </a:rPr>
-              <a:t>All 36 planted mule-ring transactions were detected.</a:t>
-            </a:r>
-          </a:p>
-        </p:txBody>
-      </p:sp>
-      <p:sp>
-        <p:nvSpPr>
-          <p:cNvPr id="5" name="Rounded Rectangle 4"/>
-          <p:cNvSpPr/>
-          <p:nvPr/>
-        </p:nvSpPr>
-        <p:spPr>
-          <a:xfrm>
-            <a:off x="6437376" y="1828800"/>
-            <a:ext cx="2743200" cy="2834640"/>
-          </a:xfrm>
-          <a:prstGeom prst="roundRect">
-            <a:avLst/>
-          </a:prstGeom>
-          <a:solidFill>
-            <a:srgbClr val="F4F6FA"/>
-          </a:solidFill>
-          <a:ln>
-            <a:solidFill>
-              <a:srgbClr val="C7D0DE"/>
-            </a:solidFill>
-          </a:ln>
-          <a:effectLst/>
-        </p:spPr>
-        <p:style>
-          <a:lnRef idx="1">
-            <a:schemeClr val="accent1"/>
-          </a:lnRef>
-          <a:fillRef idx="3">
-            <a:schemeClr val="accent1"/>
-          </a:fillRef>
-          <a:effectRef idx="2">
-            <a:schemeClr val="accent1"/>
-          </a:effectRef>
-          <a:fontRef idx="minor">
-            <a:schemeClr val="lt1"/>
-          </a:fontRef>
-        </p:style>
-        <p:txBody>
-          <a:bodyPr wrap="square" lIns="146304" tIns="182880" rIns="128016" rtlCol="0" anchor="ctr"/>
-          <a:lstStyle/>
-          <a:p>
-            <a:pPr algn="ctr">
-              <a:spcAft>
-                <a:spcPts val="800"/>
-              </a:spcAft>
-            </a:pPr>
-            <a:r>
-              <a:rPr sz="1400" b="1">
-                <a:solidFill>
-                  <a:srgbClr val="C62828"/>
-                </a:solidFill>
-                <a:latin typeface="Cambria"/>
-              </a:rPr>
-              <a:t>A finding worth reporting</a:t>
-            </a:r>
-          </a:p>
-          <a:p>
-            <a:pPr>
-              <a:spcAft>
-                <a:spcPts val="800"/>
-              </a:spcAft>
-            </a:pPr>
-            <a:r>
-              <a:rPr sz="1200" b="0">
-                <a:solidFill>
-                  <a:srgbClr val="222833"/>
-                </a:solidFill>
-                <a:latin typeface="Cambria"/>
-              </a:rPr>
-              <a:t>Nothing reaches the block threshold; every catch reaches an analyst.</a:t>
-            </a:r>
-          </a:p>
-        </p:txBody>
-      </p:sp>
-      <p:sp>
-        <p:nvSpPr>
-          <p:cNvPr id="6" name="Rounded Rectangle 5"/>
-          <p:cNvSpPr/>
-          <p:nvPr/>
-        </p:nvSpPr>
-        <p:spPr>
-          <a:xfrm>
-            <a:off x="9427464" y="1828800"/>
-            <a:ext cx="2743200" cy="2834640"/>
-          </a:xfrm>
-          <a:prstGeom prst="roundRect">
-            <a:avLst/>
-          </a:prstGeom>
-          <a:solidFill>
-            <a:srgbClr val="F4F6FA"/>
-          </a:solidFill>
-          <a:ln>
-            <a:solidFill>
-              <a:srgbClr val="C7D0DE"/>
-            </a:solidFill>
-          </a:ln>
-          <a:effectLst/>
-        </p:spPr>
-        <p:style>
-          <a:lnRef idx="1">
-            <a:schemeClr val="accent1"/>
-          </a:lnRef>
-          <a:fillRef idx="3">
-            <a:schemeClr val="accent1"/>
-          </a:fillRef>
-          <a:effectRef idx="2">
-            <a:schemeClr val="accent1"/>
-          </a:effectRef>
-          <a:fontRef idx="minor">
-            <a:schemeClr val="lt1"/>
-          </a:fontRef>
-        </p:style>
-        <p:txBody>
-          <a:bodyPr wrap="square" lIns="146304" tIns="182880" rIns="128016" rtlCol="0" anchor="ctr"/>
-          <a:lstStyle/>
-          <a:p>
-            <a:pPr algn="ctr">
-              <a:spcAft>
-                <a:spcPts val="800"/>
-              </a:spcAft>
-            </a:pPr>
-            <a:r>
-              <a:rPr sz="1400" b="1">
-                <a:solidFill>
-                  <a:srgbClr val="2E7D32"/>
-                </a:solidFill>
-                <a:latin typeface="Cambria"/>
-              </a:rPr>
-              <a:t>Engineering discipline</a:t>
-            </a:r>
-          </a:p>
-          <a:p>
-            <a:pPr>
-              <a:spcAft>
-                <a:spcPts val="800"/>
-              </a:spcAft>
-            </a:pPr>
-            <a:r>
-              <a:rPr sz="1200" b="0">
-                <a:solidFill>
-                  <a:srgbClr val="222833"/>
-                </a:solidFill>
-                <a:latin typeface="Cambria"/>
-              </a:rPr>
-              <a:t>113 automated tests, continuous integration, one-command deployment.</a:t>
-            </a:r>
-          </a:p>
-        </p:txBody>
-      </p:sp>
-    </p:spTree>
-  </p:cSld>
-  <p:clrMapOvr>
-    <a:masterClrMapping/>
-  </p:clrMapOvr>
-</p:sld>
-</file>
-
-<file path=ppt/slides/slide29.xml><?xml version="1.0" encoding="utf-8"?>
-<p:sld xmlns:a="http://schemas.openxmlformats.org/drawingml/2006/main" xmlns:r="http://schemas.openxmlformats.org/officeDocument/2006/relationships" xmlns:p="http://schemas.openxmlformats.org/presentationml/2006/main">
-  <p:cSld>
-    <p:spTree>
-      <p:nvGrpSpPr>
-        <p:cNvPr id="1" name=""/>
-        <p:cNvGrpSpPr/>
-        <p:nvPr/>
-      </p:nvGrpSpPr>
-      <p:grpSpPr>
-        <a:xfrm>
-          <a:off x="0" y="0"/>
-          <a:ext cx="0" cy="0"/>
-          <a:chOff x="0" y="0"/>
-          <a:chExt cx="0" cy="0"/>
-        </a:xfrm>
-      </p:grpSpPr>
-      <p:sp>
-        <p:nvSpPr>
-          <p:cNvPr id="2" name="Title 1"/>
-          <p:cNvSpPr>
-            <a:spLocks noGrp="1"/>
-          </p:cNvSpPr>
-          <p:nvPr>
-            <p:ph type="title"/>
-          </p:nvPr>
-        </p:nvSpPr>
-        <p:spPr/>
-        <p:txBody>
-          <a:bodyPr/>
-          <a:lstStyle/>
-          <a:p>
-            <a:r>
-              <a:rPr sz="2800" b="1">
-                <a:solidFill>
-                  <a:srgbClr val="002060"/>
-                </a:solidFill>
-                <a:latin typeface="Cambria"/>
-              </a:rPr>
-              <a:t>References</a:t>
-            </a:r>
-          </a:p>
-        </p:txBody>
-      </p:sp>
-      <p:sp>
-        <p:nvSpPr>
-          <p:cNvPr id="3" name="Content Placeholder 2"/>
-          <p:cNvSpPr>
-            <a:spLocks noGrp="1"/>
-          </p:cNvSpPr>
-          <p:nvPr>
-            <p:ph idx="1"/>
-          </p:nvPr>
-        </p:nvSpPr>
-        <p:spPr/>
-        <p:txBody>
-          <a:bodyPr wrap="square"/>
-          <a:lstStyle/>
-          <a:p>
-            <a:pPr>
-              <a:spcAft>
-                <a:spcPts val="700"/>
-              </a:spcAft>
-            </a:pPr>
-            <a:r>
-              <a:rPr sz="1300" b="0">
-                <a:solidFill>
-                  <a:srgbClr val="222833"/>
-                </a:solidFill>
-                <a:latin typeface="Cambria"/>
-              </a:rPr>
-              <a:t>[1]  Van Vlasselaer, V. et al. (2015). APATE: A novel approach for automated credit card transaction fraud detection using network-based extensions. Decision Support Systems, 75, 38–48.</a:t>
-            </a:r>
-          </a:p>
-          <a:p>
-            <a:pPr>
-              <a:spcAft>
-                <a:spcPts val="700"/>
-              </a:spcAft>
-            </a:pPr>
-            <a:r>
-              <a:rPr sz="1300" b="0">
-                <a:solidFill>
-                  <a:srgbClr val="222833"/>
-                </a:solidFill>
-                <a:latin typeface="Cambria"/>
-              </a:rPr>
-              <a:t>[2]  FICO. Falcon Fraud Manager — product documentation. fico.com.</a:t>
-            </a:r>
-          </a:p>
-          <a:p>
-            <a:pPr>
-              <a:spcAft>
-                <a:spcPts val="700"/>
-              </a:spcAft>
-            </a:pPr>
-            <a:r>
-              <a:rPr sz="1300" b="0">
-                <a:solidFill>
-                  <a:srgbClr val="222833"/>
-                </a:solidFill>
-                <a:latin typeface="Cambria"/>
-              </a:rPr>
-              <a:t>[3]  Feedzai. RiskOps platform overview. feedzai.com.</a:t>
-            </a:r>
-          </a:p>
-          <a:p>
-            <a:pPr>
-              <a:spcAft>
-                <a:spcPts val="700"/>
-              </a:spcAft>
-            </a:pPr>
-            <a:r>
-              <a:rPr sz="1300" b="0">
-                <a:solidFill>
-                  <a:srgbClr val="222833"/>
-                </a:solidFill>
-                <a:latin typeface="Cambria"/>
-              </a:rPr>
-              <a:t>[4]  Featurespace. ARIC Risk Hub — adaptive behavioural analytics. featurespace.com.</a:t>
-            </a:r>
-          </a:p>
-          <a:p>
-            <a:pPr>
-              <a:spcAft>
-                <a:spcPts val="700"/>
-              </a:spcAft>
-            </a:pPr>
-            <a:r>
-              <a:rPr sz="1300" b="0">
-                <a:solidFill>
-                  <a:srgbClr val="222833"/>
-                </a:solidFill>
-                <a:latin typeface="Cambria"/>
-              </a:rPr>
-              <a:t>[5]  Neo4j. Graph algorithms for fraud detection — developer guide. neo4j.com.</a:t>
-            </a:r>
-          </a:p>
-          <a:p>
-            <a:pPr>
-              <a:spcAft>
-                <a:spcPts val="700"/>
-              </a:spcAft>
-            </a:pPr>
-            <a:r>
-              <a:rPr sz="1300" b="0">
-                <a:solidFill>
-                  <a:srgbClr val="222833"/>
-                </a:solidFill>
-                <a:latin typeface="Cambria"/>
-              </a:rPr>
-              <a:t>[6]  LangChain &amp; ChromaDB documentation — retrieval-augmented generation.</a:t>
-            </a:r>
-          </a:p>
-        </p:txBody>
-      </p:sp>
-    </p:spTree>
-  </p:cSld>
-  <p:clrMapOvr>
-    <a:masterClrMapping/>
-  </p:clrMapOvr>
-</p:sld>
-</file>
-
-<file path=ppt/slides/slide3.xml><?xml version="1.0" encoding="utf-8"?>
-<p:sld xmlns:a="http://schemas.openxmlformats.org/drawingml/2006/main" xmlns:r="http://schemas.openxmlformats.org/officeDocument/2006/relationships" xmlns:p="http://schemas.openxmlformats.org/presentationml/2006/main">
-  <p:cSld>
-    <p:spTree>
-      <p:nvGrpSpPr>
-        <p:cNvPr id="1" name=""/>
-        <p:cNvGrpSpPr/>
-        <p:nvPr/>
-      </p:nvGrpSpPr>
-      <p:grpSpPr>
-        <a:xfrm>
-          <a:off x="0" y="0"/>
-          <a:ext cx="0" cy="0"/>
-          <a:chOff x="0" y="0"/>
-          <a:chExt cx="0" cy="0"/>
-        </a:xfrm>
-      </p:grpSpPr>
-      <p:sp>
-        <p:nvSpPr>
-          <p:cNvPr id="2" name="Title 1"/>
-          <p:cNvSpPr>
-            <a:spLocks noGrp="1"/>
-          </p:cNvSpPr>
-          <p:nvPr>
-            <p:ph type="title"/>
-          </p:nvPr>
-        </p:nvSpPr>
-        <p:spPr/>
-        <p:txBody>
-          <a:bodyPr/>
-          <a:lstStyle/>
-          <a:p>
-            <a:r>
-              <a:rPr sz="2800" b="1">
-                <a:solidFill>
-                  <a:srgbClr val="002060"/>
-                </a:solidFill>
-                <a:latin typeface="Cambria"/>
-              </a:rPr>
-              <a:t>Project Proposal Review — Comments &amp; Actions</a:t>
-            </a:r>
-          </a:p>
-        </p:txBody>
-      </p:sp>
-      <p:sp>
-        <p:nvSpPr>
-          <p:cNvPr id="3" name="Content Placeholder 2"/>
-          <p:cNvSpPr>
-            <a:spLocks noGrp="1"/>
-          </p:cNvSpPr>
-          <p:nvPr>
-            <p:ph sz="half" idx="1"/>
-          </p:nvPr>
-        </p:nvSpPr>
-        <p:spPr/>
-        <p:txBody>
-          <a:bodyPr wrap="square">
-            <a:normAutofit/>
-          </a:bodyPr>
-          <a:lstStyle/>
-          <a:p>
-            <a:pPr>
-              <a:spcAft>
-                <a:spcPts val="700"/>
-              </a:spcAft>
-            </a:pPr>
-            <a:r>
-              <a:rPr sz="1800" b="1" dirty="0">
-                <a:solidFill>
-                  <a:srgbClr val="002060"/>
-                </a:solidFill>
-                <a:latin typeface="Cambria"/>
-              </a:rPr>
-              <a:t>Comments received</a:t>
-            </a:r>
-          </a:p>
-          <a:p>
-            <a:pPr lvl="1">
-              <a:spcAft>
-                <a:spcPts val="400"/>
-              </a:spcAft>
-            </a:pPr>
-            <a:r>
-              <a:rPr sz="1600" b="0" dirty="0">
-                <a:solidFill>
-                  <a:srgbClr val="222833"/>
-                </a:solidFill>
-                <a:latin typeface="Cambria"/>
-              </a:rPr>
-              <a:t>Show measured evidence, not just a working demo</a:t>
-            </a:r>
-          </a:p>
-          <a:p>
-            <a:pPr lvl="1">
-              <a:spcAft>
-                <a:spcPts val="400"/>
-              </a:spcAft>
-            </a:pPr>
-            <a:r>
-              <a:rPr sz="1600" b="0" dirty="0">
-                <a:solidFill>
-                  <a:srgbClr val="222833"/>
-                </a:solidFill>
-                <a:latin typeface="Cambria"/>
-              </a:rPr>
-              <a:t>SRS: correct DFD notation and UML diagrams</a:t>
-            </a:r>
-          </a:p>
-          <a:p>
-            <a:pPr lvl="1">
-              <a:spcAft>
-                <a:spcPts val="400"/>
-              </a:spcAft>
-            </a:pPr>
-            <a:r>
-              <a:rPr sz="1600" b="0" dirty="0">
-                <a:solidFill>
-                  <a:srgbClr val="222833"/>
-                </a:solidFill>
-                <a:latin typeface="Cambria"/>
-              </a:rPr>
-              <a:t>Single spacing; each chapter on a new page</a:t>
-            </a:r>
-          </a:p>
-          <a:p>
-            <a:pPr lvl="1">
-              <a:spcAft>
-                <a:spcPts val="400"/>
-              </a:spcAft>
-            </a:pPr>
-            <a:r>
-              <a:rPr sz="1600" b="0" dirty="0">
-                <a:solidFill>
-                  <a:srgbClr val="222833"/>
-                </a:solidFill>
-                <a:latin typeface="Cambria"/>
-              </a:rPr>
-              <a:t>Conclusion, References, Definitions last, unnumbered</a:t>
-            </a:r>
-          </a:p>
-          <a:p>
-            <a:pPr lvl="1">
-              <a:spcAft>
-                <a:spcPts val="400"/>
-              </a:spcAft>
-            </a:pPr>
-            <a:r>
-              <a:rPr sz="1600" b="0" dirty="0">
-                <a:solidFill>
-                  <a:srgbClr val="222833"/>
-                </a:solidFill>
-                <a:latin typeface="Cambria"/>
-              </a:rPr>
-              <a:t>Abstract must be written by the team</a:t>
-            </a:r>
-          </a:p>
-          <a:p>
-            <a:pPr lvl="1">
-              <a:spcAft>
-                <a:spcPts val="400"/>
-              </a:spcAft>
-            </a:pPr>
-            <a:r>
-              <a:rPr sz="1600" b="0" dirty="0">
-                <a:solidFill>
-                  <a:srgbClr val="222833"/>
-                </a:solidFill>
-                <a:latin typeface="Cambria"/>
-              </a:rPr>
-              <a:t>Keep the repository updated for review</a:t>
-            </a:r>
-          </a:p>
-        </p:txBody>
-      </p:sp>
-      <p:sp>
-        <p:nvSpPr>
-          <p:cNvPr id="4" name="Content Placeholder 3"/>
-          <p:cNvSpPr>
-            <a:spLocks noGrp="1"/>
-          </p:cNvSpPr>
-          <p:nvPr>
-            <p:ph sz="half" idx="2"/>
-          </p:nvPr>
-        </p:nvSpPr>
-        <p:spPr/>
-        <p:txBody>
-          <a:bodyPr wrap="square"/>
-          <a:lstStyle/>
-          <a:p>
-            <a:pPr>
-              <a:spcAft>
-                <a:spcPts val="700"/>
-              </a:spcAft>
-            </a:pPr>
-            <a:r>
-              <a:rPr sz="1800" b="1" dirty="0">
-                <a:solidFill>
-                  <a:srgbClr val="2E7D32"/>
-                </a:solidFill>
-                <a:latin typeface="Cambria"/>
-              </a:rPr>
-              <a:t>Action taken</a:t>
-            </a:r>
-          </a:p>
-          <a:p>
-            <a:pPr lvl="1">
-              <a:spcAft>
-                <a:spcPts val="400"/>
-              </a:spcAft>
-            </a:pPr>
-            <a:r>
-              <a:rPr sz="1600" b="0" dirty="0">
-                <a:solidFill>
-                  <a:srgbClr val="222833"/>
-                </a:solidFill>
-                <a:latin typeface="Cambria"/>
-              </a:rPr>
-              <a:t>Evaluation harness built; the measured results are in this deck</a:t>
-            </a:r>
-          </a:p>
-          <a:p>
-            <a:pPr lvl="1">
-              <a:spcAft>
-                <a:spcPts val="400"/>
-              </a:spcAft>
-            </a:pPr>
-            <a:r>
-              <a:rPr sz="1600" b="0" dirty="0">
-                <a:solidFill>
-                  <a:srgbClr val="222833"/>
-                </a:solidFill>
-                <a:latin typeface="Cambria"/>
-              </a:rPr>
-              <a:t>DFDs redrawn in Gane-Sarson notation; 7 UML diagrams</a:t>
-            </a:r>
-          </a:p>
-          <a:p>
-            <a:pPr lvl="1">
-              <a:spcAft>
-                <a:spcPts val="400"/>
-              </a:spcAft>
-            </a:pPr>
-            <a:r>
-              <a:rPr sz="1600" b="0" dirty="0">
-                <a:solidFill>
-                  <a:srgbClr val="222833"/>
-                </a:solidFill>
-                <a:latin typeface="Cambria"/>
-              </a:rPr>
-              <a:t>Document reformatted to the prescribed style</a:t>
-            </a:r>
-          </a:p>
-          <a:p>
-            <a:pPr lvl="1">
-              <a:spcAft>
-                <a:spcPts val="400"/>
-              </a:spcAft>
-            </a:pPr>
-            <a:r>
-              <a:rPr sz="1600" b="0" dirty="0">
-                <a:solidFill>
-                  <a:srgbClr val="222833"/>
-                </a:solidFill>
-                <a:latin typeface="Cambria"/>
-              </a:rPr>
-              <a:t>Sections reordered as instructed</a:t>
-            </a:r>
-          </a:p>
-          <a:p>
-            <a:pPr lvl="1">
-              <a:spcAft>
-                <a:spcPts val="400"/>
-              </a:spcAft>
-            </a:pPr>
-            <a:r>
-              <a:rPr sz="1600" b="0" dirty="0">
-                <a:solidFill>
-                  <a:srgbClr val="222833"/>
-                </a:solidFill>
-                <a:latin typeface="Cambria"/>
-              </a:rPr>
-              <a:t>Abstract written by the team, not generated</a:t>
-            </a:r>
-          </a:p>
-          <a:p>
-            <a:pPr lvl="1">
-              <a:spcAft>
-                <a:spcPts val="400"/>
-              </a:spcAft>
-            </a:pPr>
-            <a:r>
-              <a:rPr sz="1600" b="0" dirty="0">
-                <a:solidFill>
-                  <a:srgbClr val="222833"/>
-                </a:solidFill>
-                <a:latin typeface="Cambria"/>
-              </a:rPr>
-              <a:t>Repository public; continuous integration runs 113 tests on every push</a:t>
-            </a:r>
-            <a:endParaRPr sz="1300" b="0" dirty="0">
-              <a:solidFill>
-                <a:srgbClr val="222833"/>
-              </a:solidFill>
-              <a:latin typeface="Cambria"/>
-            </a:endParaRPr>
-          </a:p>
-        </p:txBody>
-      </p:sp>
-      <p:sp>
-        <p:nvSpPr>
-          <p:cNvPr id="5" name="TextBox 4"/>
-          <p:cNvSpPr txBox="1"/>
-          <p:nvPr/>
-        </p:nvSpPr>
-        <p:spPr>
-          <a:xfrm>
-            <a:off x="18288" y="109728"/>
-            <a:ext cx="8229600" cy="292608"/>
-          </a:xfrm>
-          <a:prstGeom prst="rect">
-            <a:avLst/>
-          </a:prstGeom>
-          <a:noFill/>
-        </p:spPr>
-        <p:txBody>
-          <a:bodyPr wrap="none">
-            <a:spAutoFit/>
-          </a:bodyPr>
-          <a:lstStyle/>
-          <a:p>
-            <a:r>
-              <a:rPr sz="1100" b="1">
-                <a:solidFill>
-                  <a:srgbClr val="028090"/>
-                </a:solidFill>
-                <a:latin typeface="Cambria"/>
-              </a:rPr>
-              <a:t>01 · PROPOSAL REVIEW</a:t>
-            </a:r>
-          </a:p>
-        </p:txBody>
-      </p:sp>
-    </p:spTree>
-  </p:cSld>
-  <p:clrMapOvr>
-    <a:masterClrMapping/>
-  </p:clrMapOvr>
-</p:sld>
-</file>
-
-<file path=ppt/slides/slide30.xml><?xml version="1.0" encoding="utf-8"?>
+<file path=ppt/slides/slide25.xml><?xml version="1.0" encoding="utf-8"?>
 <p:sld xmlns:a="http://schemas.openxmlformats.org/drawingml/2006/main" xmlns:r="http://schemas.openxmlformats.org/officeDocument/2006/relationships" xmlns:p="http://schemas.openxmlformats.org/presentationml/2006/main">
   <p:cSld>
     <p:spTree>
@@ -11915,7 +10900,7 @@
 </p:sld>
 </file>
 
-<file path=ppt/slides/slide31.xml><?xml version="1.0" encoding="utf-8"?>
+<file path=ppt/slides/slide26.xml><?xml version="1.0" encoding="utf-8"?>
 <p:sld xmlns:a="http://schemas.openxmlformats.org/drawingml/2006/main" xmlns:r="http://schemas.openxmlformats.org/officeDocument/2006/relationships" xmlns:p="http://schemas.openxmlformats.org/presentationml/2006/main">
   <p:cSld>
     <p:spTree>
@@ -11990,6 +10975,356 @@
               </a:solidFill>
               <a:latin typeface="Cambria"/>
             </a:endParaRPr>
+          </a:p>
+        </p:txBody>
+      </p:sp>
+    </p:spTree>
+  </p:cSld>
+  <p:clrMapOvr>
+    <a:masterClrMapping/>
+  </p:clrMapOvr>
+</p:sld>
+</file>
+
+<file path=ppt/slides/slide3.xml><?xml version="1.0" encoding="utf-8"?>
+<p:sld xmlns:a="http://schemas.openxmlformats.org/drawingml/2006/main" xmlns:r="http://schemas.openxmlformats.org/officeDocument/2006/relationships" xmlns:p="http://schemas.openxmlformats.org/presentationml/2006/main">
+  <p:cSld>
+    <p:spTree>
+      <p:nvGrpSpPr>
+        <p:cNvPr id="1" name=""/>
+        <p:cNvGrpSpPr/>
+        <p:nvPr/>
+      </p:nvGrpSpPr>
+      <p:grpSpPr>
+        <a:xfrm>
+          <a:off x="0" y="0"/>
+          <a:ext cx="0" cy="0"/>
+          <a:chOff x="0" y="0"/>
+          <a:chExt cx="0" cy="0"/>
+        </a:xfrm>
+      </p:grpSpPr>
+      <p:sp>
+        <p:nvSpPr>
+          <p:cNvPr id="2" name="Title 1"/>
+          <p:cNvSpPr>
+            <a:spLocks noGrp="1"/>
+          </p:cNvSpPr>
+          <p:nvPr>
+            <p:ph type="title"/>
+          </p:nvPr>
+        </p:nvSpPr>
+        <p:spPr/>
+        <p:txBody>
+          <a:bodyPr/>
+          <a:lstStyle/>
+          <a:p>
+            <a:r>
+              <a:rPr sz="2800" b="1">
+                <a:solidFill>
+                  <a:srgbClr val="002060"/>
+                </a:solidFill>
+                <a:latin typeface="Cambria"/>
+              </a:rPr>
+              <a:t>Project Proposal Review — Comments &amp; Actions</a:t>
+            </a:r>
+          </a:p>
+        </p:txBody>
+      </p:sp>
+      <p:sp>
+        <p:nvSpPr>
+          <p:cNvPr id="3" name="Content Placeholder 2"/>
+          <p:cNvSpPr>
+            <a:spLocks noGrp="1"/>
+          </p:cNvSpPr>
+          <p:nvPr>
+            <p:ph sz="half" idx="1"/>
+          </p:nvPr>
+        </p:nvSpPr>
+        <p:spPr/>
+        <p:txBody>
+          <a:bodyPr wrap="square">
+            <a:normAutofit/>
+          </a:bodyPr>
+          <a:lstStyle/>
+          <a:p>
+            <a:pPr>
+              <a:spcAft>
+                <a:spcPts val="700"/>
+              </a:spcAft>
+            </a:pPr>
+            <a:r>
+              <a:rPr sz="1800" b="1" dirty="0">
+                <a:solidFill>
+                  <a:srgbClr val="002060"/>
+                </a:solidFill>
+                <a:latin typeface="Cambria"/>
+              </a:rPr>
+              <a:t>Comments received</a:t>
+            </a:r>
+          </a:p>
+          <a:p>
+            <a:pPr lvl="1">
+              <a:spcAft>
+                <a:spcPts val="400"/>
+              </a:spcAft>
+            </a:pPr>
+            <a:r>
+              <a:rPr sz="1600" b="0" dirty="0">
+                <a:solidFill>
+                  <a:srgbClr val="222833"/>
+                </a:solidFill>
+                <a:latin typeface="Cambria"/>
+              </a:rPr>
+              <a:t>Show measured evidence, not just a working demo</a:t>
+            </a:r>
+          </a:p>
+          <a:p>
+            <a:pPr lvl="1">
+              <a:spcAft>
+                <a:spcPts val="400"/>
+              </a:spcAft>
+            </a:pPr>
+            <a:r>
+              <a:rPr sz="1600" b="0" dirty="0">
+                <a:solidFill>
+                  <a:srgbClr val="222833"/>
+                </a:solidFill>
+                <a:latin typeface="Cambria"/>
+              </a:rPr>
+              <a:t>SRS: correct DFD notation and UML diagrams</a:t>
+            </a:r>
+          </a:p>
+          <a:p>
+            <a:pPr lvl="1">
+              <a:spcAft>
+                <a:spcPts val="400"/>
+              </a:spcAft>
+            </a:pPr>
+            <a:r>
+              <a:rPr sz="1600" b="0" dirty="0">
+                <a:solidFill>
+                  <a:srgbClr val="222833"/>
+                </a:solidFill>
+                <a:latin typeface="Cambria"/>
+              </a:rPr>
+              <a:t>Single spacing; each chapter on a new page</a:t>
+            </a:r>
+          </a:p>
+          <a:p>
+            <a:pPr lvl="1">
+              <a:spcAft>
+                <a:spcPts val="400"/>
+              </a:spcAft>
+            </a:pPr>
+            <a:r>
+              <a:rPr sz="1600" b="0" dirty="0">
+                <a:solidFill>
+                  <a:srgbClr val="222833"/>
+                </a:solidFill>
+                <a:latin typeface="Cambria"/>
+              </a:rPr>
+              <a:t>Conclusion, References, Definitions last, unnumbered</a:t>
+            </a:r>
+          </a:p>
+          <a:p>
+            <a:pPr lvl="1">
+              <a:spcAft>
+                <a:spcPts val="400"/>
+              </a:spcAft>
+            </a:pPr>
+            <a:r>
+              <a:rPr sz="1600" b="0" dirty="0">
+                <a:solidFill>
+                  <a:srgbClr val="222833"/>
+                </a:solidFill>
+                <a:latin typeface="Cambria"/>
+              </a:rPr>
+              <a:t>Abstract must be written by the team</a:t>
+            </a:r>
+          </a:p>
+          <a:p>
+            <a:pPr lvl="1">
+              <a:spcAft>
+                <a:spcPts val="400"/>
+              </a:spcAft>
+            </a:pPr>
+            <a:r>
+              <a:rPr sz="1600" b="0" dirty="0">
+                <a:solidFill>
+                  <a:srgbClr val="222833"/>
+                </a:solidFill>
+                <a:latin typeface="Cambria"/>
+              </a:rPr>
+              <a:t>Keep the repository updated for review</a:t>
+            </a:r>
+          </a:p>
+        </p:txBody>
+      </p:sp>
+      <p:sp>
+        <p:nvSpPr>
+          <p:cNvPr id="4" name="Content Placeholder 3"/>
+          <p:cNvSpPr>
+            <a:spLocks noGrp="1"/>
+          </p:cNvSpPr>
+          <p:nvPr>
+            <p:ph sz="half" idx="2"/>
+          </p:nvPr>
+        </p:nvSpPr>
+        <p:spPr/>
+        <p:txBody>
+          <a:bodyPr wrap="square"/>
+          <a:lstStyle/>
+          <a:p>
+            <a:pPr>
+              <a:spcAft>
+                <a:spcPts val="700"/>
+              </a:spcAft>
+            </a:pPr>
+            <a:r>
+              <a:rPr sz="1800" b="1" dirty="0">
+                <a:solidFill>
+                  <a:srgbClr val="2E7D32"/>
+                </a:solidFill>
+                <a:latin typeface="Cambria"/>
+              </a:rPr>
+              <a:t>Action taken</a:t>
+            </a:r>
+          </a:p>
+          <a:p>
+            <a:pPr lvl="1">
+              <a:spcAft>
+                <a:spcPts val="400"/>
+              </a:spcAft>
+            </a:pPr>
+            <a:r>
+              <a:rPr sz="1600" b="0" dirty="0">
+                <a:solidFill>
+                  <a:srgbClr val="222833"/>
+                </a:solidFill>
+                <a:latin typeface="Cambria"/>
+              </a:rPr>
+              <a:t>Evaluation harness built; the measured results are in this deck</a:t>
+            </a:r>
+          </a:p>
+          <a:p>
+            <a:pPr lvl="1">
+              <a:spcAft>
+                <a:spcPts val="400"/>
+              </a:spcAft>
+            </a:pPr>
+            <a:r>
+              <a:rPr sz="1600" b="0" dirty="0">
+                <a:solidFill>
+                  <a:srgbClr val="222833"/>
+                </a:solidFill>
+                <a:latin typeface="Cambria"/>
+              </a:rPr>
+              <a:t>DFDs redrawn in Gane-Sarson notation; 7 UML diagrams</a:t>
+            </a:r>
+          </a:p>
+          <a:p>
+            <a:pPr lvl="1">
+              <a:spcAft>
+                <a:spcPts val="400"/>
+              </a:spcAft>
+            </a:pPr>
+            <a:r>
+              <a:rPr sz="1600" b="0" dirty="0">
+                <a:solidFill>
+                  <a:srgbClr val="222833"/>
+                </a:solidFill>
+                <a:latin typeface="Cambria"/>
+              </a:rPr>
+              <a:t>Document reformatted to the prescribed style</a:t>
+            </a:r>
+          </a:p>
+          <a:p>
+            <a:pPr lvl="1">
+              <a:spcAft>
+                <a:spcPts val="400"/>
+              </a:spcAft>
+            </a:pPr>
+            <a:r>
+              <a:rPr sz="1600" b="0" dirty="0">
+                <a:solidFill>
+                  <a:srgbClr val="222833"/>
+                </a:solidFill>
+                <a:latin typeface="Cambria"/>
+              </a:rPr>
+              <a:t>Sections reordered as instructed</a:t>
+            </a:r>
+          </a:p>
+          <a:p>
+            <a:pPr lvl="1">
+              <a:spcAft>
+                <a:spcPts val="400"/>
+              </a:spcAft>
+            </a:pPr>
+            <a:r>
+              <a:rPr sz="1600" b="0" dirty="0">
+                <a:solidFill>
+                  <a:srgbClr val="222833"/>
+                </a:solidFill>
+                <a:latin typeface="Cambria"/>
+              </a:rPr>
+              <a:t>Abstract written by the team, not generated</a:t>
+            </a:r>
+          </a:p>
+          <a:p>
+            <a:pPr lvl="1">
+              <a:spcAft>
+                <a:spcPts val="400"/>
+              </a:spcAft>
+            </a:pPr>
+            <a:r>
+              <a:rPr sz="1600" b="0" dirty="0">
+                <a:solidFill>
+                  <a:srgbClr val="222833"/>
+                </a:solidFill>
+                <a:latin typeface="Cambria"/>
+              </a:rPr>
+              <a:t>Repository public; continuous integration runs 113 tests on every push</a:t>
+            </a:r>
+            <a:endParaRPr sz="1300" b="0" dirty="0">
+              <a:solidFill>
+                <a:srgbClr val="222833"/>
+              </a:solidFill>
+              <a:latin typeface="Cambria"/>
+            </a:endParaRPr>
+          </a:p>
+        </p:txBody>
+      </p:sp>
+      <p:sp>
+        <p:nvSpPr>
+          <p:cNvPr id="5" name="TextBox 4"/>
+          <p:cNvSpPr txBox="1"/>
+          <p:nvPr/>
+        </p:nvSpPr>
+        <p:spPr>
+          <a:xfrm>
+            <a:off x="18288" y="109728"/>
+            <a:ext cx="8229600" cy="292608"/>
+          </a:xfrm>
+          <a:prstGeom prst="rect">
+            <a:avLst/>
+          </a:prstGeom>
+          <a:noFill/>
+        </p:spPr>
+        <p:txBody>
+          <a:bodyPr wrap="none">
+            <a:spAutoFit/>
+          </a:bodyPr>
+          <a:lstStyle/>
+          <a:p>
+            <a:r>
+              <a:rPr sz="1100" b="1">
+                <a:solidFill>
+                  <a:srgbClr val="028090"/>
+                </a:solidFill>
+                <a:latin typeface="Cambria"/>
+              </a:rPr>
+              <a:t>01 · PROPOSAL REVIEW</a:t>
+            </a:r>
           </a:p>
         </p:txBody>
       </p:sp>

--- a/docs/Indus11-Final-Review.pptx
+++ b/docs/Indus11-Final-Review.pptx
@@ -31,7 +31,6 @@
     <p:sldId id="285" r:id="rId37"/>
     <p:sldId id="286" r:id="rId38"/>
     <p:sldId id="269" r:id="rId19"/>
-    <p:sldId id="265" r:id="rId21"/>
     <p:sldId id="267" r:id="rId23"/>
     <p:sldId id="271" r:id="rId24"/>
     <p:sldId id="268" r:id="rId25"/>
@@ -8652,7 +8651,7 @@
                 </a:solidFill>
                 <a:latin typeface="Cambria"/>
               </a:rPr>
-              <a:t>7.  Challenges Faced &amp; Future Work</a:t>
+              <a:t>7.  References</a:t>
             </a:r>
           </a:p>
           <a:p>
@@ -8663,18 +8662,7 @@
                 </a:solidFill>
                 <a:latin typeface="Cambria"/>
               </a:rPr>
-              <a:t>8.  References</a:t>
-            </a:r>
-          </a:p>
-          <a:p>
-            <a:r>
-              <a:rPr sz="2000">
-                <a:solidFill>
-                  <a:srgbClr val="222833"/>
-                </a:solidFill>
-                <a:latin typeface="Cambria"/>
-              </a:rPr>
-              <a:t>9.  Team Contributions</a:t>
+              <a:t>8.  Team Contributions</a:t>
             </a:r>
           </a:p>
         </p:txBody>
@@ -9587,7 +9575,7 @@
                 </a:solidFill>
                 <a:latin typeface="Cambria"/>
               </a:rPr>
-              <a:t>Challenges Faced &amp; Future Work</a:t>
+              <a:t>References</a:t>
             </a:r>
           </a:p>
         </p:txBody>
@@ -9599,7 +9587,7 @@
             <a:spLocks noGrp="1"/>
           </p:cNvSpPr>
           <p:nvPr>
-            <p:ph sz="half" idx="1"/>
+            <p:ph idx="1"/>
           </p:nvPr>
         </p:nvSpPr>
         <p:spPr/>
@@ -9613,127 +9601,15 @@
               </a:spcAft>
             </a:pPr>
             <a:r>
-              <a:rPr sz="1800" b="1">
-                <a:solidFill>
-                  <a:srgbClr val="B26A00"/>
-                </a:solidFill>
-                <a:latin typeface="Cambria"/>
-              </a:rPr>
-              <a:t>Challenges faced</a:t>
-            </a:r>
-          </a:p>
-          <a:p>
-            <a:pPr lvl="1">
-              <a:spcAft>
-                <a:spcPts val="400"/>
-              </a:spcAft>
-            </a:pPr>
-            <a:r>
-              <a:rPr sz="1600" b="0">
-                <a:solidFill>
-                  <a:srgbClr val="222833"/>
-                </a:solidFill>
-                <a:latin typeface="Cambria"/>
-              </a:rPr>
-              <a:t>Coordinating four data stores on one machine</a:t>
-            </a:r>
-          </a:p>
-          <a:p>
-            <a:pPr lvl="1">
-              <a:spcAft>
-                <a:spcPts val="400"/>
-              </a:spcAft>
-            </a:pPr>
-            <a:r>
-              <a:rPr sz="1600" b="0">
-                <a:solidFill>
-                  <a:srgbClr val="222833"/>
-                </a:solidFill>
-                <a:latin typeface="Cambria"/>
-              </a:rPr>
-              <a:t>Keeping model output consistent — solved with a 30-point cap</a:t>
-            </a:r>
-          </a:p>
-          <a:p>
-            <a:pPr lvl="1">
-              <a:spcAft>
-                <a:spcPts val="400"/>
-              </a:spcAft>
-            </a:pPr>
-            <a:r>
-              <a:rPr sz="1600" b="0">
-                <a:solidFill>
-                  <a:srgbClr val="222833"/>
-                </a:solidFill>
-                <a:latin typeface="Cambria"/>
-              </a:rPr>
-              <a:t>Writing Cypher queries for circular money-mule flows</a:t>
-            </a:r>
-          </a:p>
-          <a:p>
-            <a:pPr lvl="1">
-              <a:spcAft>
-                <a:spcPts val="400"/>
-              </a:spcAft>
-            </a:pPr>
-            <a:r>
-              <a:rPr sz="1600" b="0">
-                <a:solidFill>
-                  <a:srgbClr val="222833"/>
-                </a:solidFill>
-                <a:latin typeface="Cambria"/>
-              </a:rPr>
-              <a:t>Two defects the benchmark exposed: a repeated request returned</a:t>
-            </a:r>
-          </a:p>
-          <a:p>
-            <a:pPr lvl="1">
-              <a:spcAft>
-                <a:spcPts val="400"/>
-              </a:spcAft>
-            </a:pPr>
-            <a:r>
-              <a:rPr sz="1600" b="0">
-                <a:solidFill>
-                  <a:srgbClr val="222833"/>
-                </a:solidFill>
-                <a:latin typeface="Cambria"/>
-              </a:rPr>
-              <a:t>a server error, and a parsing fault silently zeroed the AI</a:t>
-            </a:r>
-          </a:p>
-          <a:p>
-            <a:pPr lvl="1">
-              <a:spcAft>
-                <a:spcPts val="400"/>
-              </a:spcAft>
-            </a:pPr>
-            <a:r>
-              <a:rPr sz="1600" b="0">
-                <a:solidFill>
-                  <a:srgbClr val="222833"/>
-                </a:solidFill>
-                <a:latin typeface="Cambria"/>
-              </a:rPr>
-              <a:t>score — both fixed and covered by tests</a:t>
-            </a:r>
-          </a:p>
-        </p:txBody>
-      </p:sp>
-      <p:sp>
-        <p:nvSpPr>
-          <p:cNvPr id="4" name="Content Placeholder 3"/>
-          <p:cNvSpPr>
-            <a:spLocks noGrp="1"/>
-          </p:cNvSpPr>
-          <p:nvPr>
-            <p:ph sz="half" idx="2"/>
-          </p:nvPr>
-        </p:nvSpPr>
-        <p:spPr/>
-        <p:txBody>
-          <a:bodyPr wrap="square"/>
-          <a:lstStyle/>
+              <a:rPr sz="1300" b="0">
+                <a:solidFill>
+                  <a:srgbClr val="222833"/>
+                </a:solidFill>
+                <a:latin typeface="Cambria"/>
+              </a:rPr>
+              <a:t>[1]  Van Vlasselaer, V. et al. (2015). APATE: A novel approach for automated credit card transaction fraud detection using network-based extensions. Decision Support Systems, 75, 38–48.</a:t>
+            </a:r>
+          </a:p>
           <a:p>
             <a:pPr>
               <a:spcAft>
@@ -9741,143 +9617,77 @@
               </a:spcAft>
             </a:pPr>
             <a:r>
-              <a:rPr sz="1800" b="1">
-                <a:solidFill>
-                  <a:srgbClr val="2E7D32"/>
-                </a:solidFill>
-                <a:latin typeface="Cambria"/>
-              </a:rPr>
-              <a:t>Future work</a:t>
-            </a:r>
-          </a:p>
-          <a:p>
-            <a:pPr lvl="1">
+              <a:rPr sz="1300" b="0">
+                <a:solidFill>
+                  <a:srgbClr val="222833"/>
+                </a:solidFill>
+                <a:latin typeface="Cambria"/>
+              </a:rPr>
+              <a:t>[2]  FICO. Falcon Fraud Manager — product documentation. fico.com.</a:t>
+            </a:r>
+          </a:p>
+          <a:p>
+            <a:pPr>
               <a:spcAft>
-                <a:spcPts val="400"/>
+                <a:spcPts val="700"/>
               </a:spcAft>
             </a:pPr>
             <a:r>
-              <a:rPr sz="1600" b="0">
-                <a:solidFill>
-                  <a:srgbClr val="222833"/>
-                </a:solidFill>
-                <a:latin typeface="Cambria"/>
-              </a:rPr>
-              <a:t>Resolve the block-threshold trade-off from recorded scores</a:t>
-            </a:r>
-          </a:p>
-          <a:p>
-            <a:pPr lvl="1">
+              <a:rPr sz="1300" b="0">
+                <a:solidFill>
+                  <a:srgbClr val="222833"/>
+                </a:solidFill>
+                <a:latin typeface="Cambria"/>
+              </a:rPr>
+              <a:t>[3]  Feedzai. RiskOps platform overview. feedzai.com.</a:t>
+            </a:r>
+          </a:p>
+          <a:p>
+            <a:pPr>
               <a:spcAft>
-                <a:spcPts val="400"/>
+                <a:spcPts val="700"/>
               </a:spcAft>
             </a:pPr>
             <a:r>
-              <a:rPr sz="1600" b="0">
-                <a:solidFill>
-                  <a:srgbClr val="222833"/>
-                </a:solidFill>
-                <a:latin typeface="Cambria"/>
-              </a:rPr>
-              <a:t>Add API authentication and request logging</a:t>
-            </a:r>
-          </a:p>
-          <a:p>
-            <a:pPr lvl="1">
+              <a:rPr sz="1300" b="0">
+                <a:solidFill>
+                  <a:srgbClr val="222833"/>
+                </a:solidFill>
+                <a:latin typeface="Cambria"/>
+              </a:rPr>
+              <a:t>[4]  Featurespace. ARIC Risk Hub — adaptive behavioural analytics. featurespace.com.</a:t>
+            </a:r>
+          </a:p>
+          <a:p>
+            <a:pPr>
               <a:spcAft>
-                <a:spcPts val="400"/>
+                <a:spcPts val="700"/>
               </a:spcAft>
             </a:pPr>
             <a:r>
-              <a:rPr sz="1600" b="0">
-                <a:solidFill>
-                  <a:srgbClr val="222833"/>
-                </a:solidFill>
-                <a:latin typeface="Cambria"/>
-              </a:rPr>
-              <a:t>Fraud-ring visualisation on the graph endpoint</a:t>
-            </a:r>
-          </a:p>
-          <a:p>
-            <a:pPr lvl="1">
+              <a:rPr sz="1300" b="0">
+                <a:solidFill>
+                  <a:srgbClr val="222833"/>
+                </a:solidFill>
+                <a:latin typeface="Cambria"/>
+              </a:rPr>
+              <a:t>[5]  Neo4j. Graph algorithms for fraud detection — developer guide. neo4j.com.</a:t>
+            </a:r>
+          </a:p>
+          <a:p>
+            <a:pPr>
               <a:spcAft>
-                <a:spcPts val="400"/>
+                <a:spcPts val="700"/>
               </a:spcAft>
             </a:pPr>
             <a:r>
-              <a:rPr sz="1600" b="0">
-                <a:solidFill>
-                  <a:srgbClr val="222833"/>
-                </a:solidFill>
-                <a:latin typeface="Cambria"/>
-              </a:rPr>
-              <a:t>Investigate the 7 undetected frauds; fan-in / fan-out patterns</a:t>
-            </a:r>
-          </a:p>
-          <a:p>
-            <a:pPr lvl="1">
-              <a:spcAft>
-                <a:spcPts val="400"/>
-              </a:spcAft>
-            </a:pPr>
-            <a:r>
-              <a:rPr sz="1600" b="0">
-                <a:solidFill>
-                  <a:srgbClr val="222833"/>
-                </a:solidFill>
-                <a:latin typeface="Cambria"/>
-              </a:rPr>
-              <a:t>Train a supervised classifier as a fourth signal</a:t>
-            </a:r>
-          </a:p>
-          <a:p>
-            <a:pPr lvl="1">
-              <a:spcAft>
-                <a:spcPts val="400"/>
-              </a:spcAft>
-            </a:pPr>
-            <a:r>
-              <a:rPr sz="1600" b="0">
-                <a:solidFill>
-                  <a:srgbClr val="222833"/>
-                </a:solidFill>
-                <a:latin typeface="Cambria"/>
-              </a:rPr>
-              <a:t>Reduce latency, presently dominated by the local model</a:t>
-            </a:r>
-          </a:p>
-        </p:txBody>
-      </p:sp>
-      <p:sp>
-        <p:nvSpPr>
-          <p:cNvPr id="5" name="TextBox 4"/>
-          <p:cNvSpPr txBox="1"/>
-          <p:nvPr/>
-        </p:nvSpPr>
-        <p:spPr>
-          <a:xfrm>
-            <a:off x="18288" y="109728"/>
-            <a:ext cx="8229600" cy="292608"/>
-          </a:xfrm>
-          <a:prstGeom prst="rect">
-            <a:avLst/>
-          </a:prstGeom>
-          <a:noFill/>
-        </p:spPr>
-        <p:txBody>
-          <a:bodyPr wrap="none">
-            <a:spAutoFit/>
-          </a:bodyPr>
-          <a:lstStyle/>
-          <a:p>
-            <a:r>
-              <a:rPr sz="1100" b="1">
-                <a:solidFill>
-                  <a:srgbClr val="028090"/>
-                </a:solidFill>
-                <a:latin typeface="Cambria"/>
-              </a:rPr>
-              <a:t>07 · CHALLENGES &amp; FUTURE WORK</a:t>
+              <a:rPr sz="1300" b="0">
+                <a:solidFill>
+                  <a:srgbClr val="222833"/>
+                </a:solidFill>
+                <a:latin typeface="Cambria"/>
+              </a:rPr>
+              <a:t>[6]  LangChain &amp; ChromaDB documentation — retrieval-augmented generation.</a:t>
             </a:r>
           </a:p>
         </p:txBody>
@@ -9890,171 +9700,7 @@
 </p:sld>
 </file>
 
-<file path=ppt/slides/slide24.xml><?xml version="1.0" encoding="utf-8"?>
-<p:sld xmlns:a="http://schemas.openxmlformats.org/drawingml/2006/main" xmlns:r="http://schemas.openxmlformats.org/officeDocument/2006/relationships" xmlns:p="http://schemas.openxmlformats.org/presentationml/2006/main">
-  <p:cSld>
-    <p:spTree>
-      <p:nvGrpSpPr>
-        <p:cNvPr id="1" name=""/>
-        <p:cNvGrpSpPr/>
-        <p:nvPr/>
-      </p:nvGrpSpPr>
-      <p:grpSpPr>
-        <a:xfrm>
-          <a:off x="0" y="0"/>
-          <a:ext cx="0" cy="0"/>
-          <a:chOff x="0" y="0"/>
-          <a:chExt cx="0" cy="0"/>
-        </a:xfrm>
-      </p:grpSpPr>
-      <p:sp>
-        <p:nvSpPr>
-          <p:cNvPr id="2" name="Title 1"/>
-          <p:cNvSpPr>
-            <a:spLocks noGrp="1"/>
-          </p:cNvSpPr>
-          <p:nvPr>
-            <p:ph type="title"/>
-          </p:nvPr>
-        </p:nvSpPr>
-        <p:spPr/>
-        <p:txBody>
-          <a:bodyPr/>
-          <a:lstStyle/>
-          <a:p>
-            <a:r>
-              <a:rPr sz="2800" b="1">
-                <a:solidFill>
-                  <a:srgbClr val="002060"/>
-                </a:solidFill>
-                <a:latin typeface="Cambria"/>
-              </a:rPr>
-              <a:t>References</a:t>
-            </a:r>
-          </a:p>
-        </p:txBody>
-      </p:sp>
-      <p:sp>
-        <p:nvSpPr>
-          <p:cNvPr id="3" name="Content Placeholder 2"/>
-          <p:cNvSpPr>
-            <a:spLocks noGrp="1"/>
-          </p:cNvSpPr>
-          <p:nvPr>
-            <p:ph idx="1"/>
-          </p:nvPr>
-        </p:nvSpPr>
-        <p:spPr/>
-        <p:txBody>
-          <a:bodyPr wrap="square"/>
-          <a:lstStyle/>
-          <a:p>
-            <a:pPr>
-              <a:spcAft>
-                <a:spcPts val="700"/>
-              </a:spcAft>
-            </a:pPr>
-            <a:r>
-              <a:rPr sz="1300" b="0">
-                <a:solidFill>
-                  <a:srgbClr val="222833"/>
-                </a:solidFill>
-                <a:latin typeface="Cambria"/>
-              </a:rPr>
-              <a:t>[1]  Van Vlasselaer, V. et al. (2015). APATE: A novel approach for automated credit card transaction fraud detection using network-based extensions. Decision Support Systems, 75, 38–48.</a:t>
-            </a:r>
-          </a:p>
-          <a:p>
-            <a:pPr>
-              <a:spcAft>
-                <a:spcPts val="700"/>
-              </a:spcAft>
-            </a:pPr>
-            <a:r>
-              <a:rPr sz="1300" b="0">
-                <a:solidFill>
-                  <a:srgbClr val="222833"/>
-                </a:solidFill>
-                <a:latin typeface="Cambria"/>
-              </a:rPr>
-              <a:t>[2]  FICO. Falcon Fraud Manager — product documentation. fico.com.</a:t>
-            </a:r>
-          </a:p>
-          <a:p>
-            <a:pPr>
-              <a:spcAft>
-                <a:spcPts val="700"/>
-              </a:spcAft>
-            </a:pPr>
-            <a:r>
-              <a:rPr sz="1300" b="0">
-                <a:solidFill>
-                  <a:srgbClr val="222833"/>
-                </a:solidFill>
-                <a:latin typeface="Cambria"/>
-              </a:rPr>
-              <a:t>[3]  Feedzai. RiskOps platform overview. feedzai.com.</a:t>
-            </a:r>
-          </a:p>
-          <a:p>
-            <a:pPr>
-              <a:spcAft>
-                <a:spcPts val="700"/>
-              </a:spcAft>
-            </a:pPr>
-            <a:r>
-              <a:rPr sz="1300" b="0">
-                <a:solidFill>
-                  <a:srgbClr val="222833"/>
-                </a:solidFill>
-                <a:latin typeface="Cambria"/>
-              </a:rPr>
-              <a:t>[4]  Featurespace. ARIC Risk Hub — adaptive behavioural analytics. featurespace.com.</a:t>
-            </a:r>
-          </a:p>
-          <a:p>
-            <a:pPr>
-              <a:spcAft>
-                <a:spcPts val="700"/>
-              </a:spcAft>
-            </a:pPr>
-            <a:r>
-              <a:rPr sz="1300" b="0">
-                <a:solidFill>
-                  <a:srgbClr val="222833"/>
-                </a:solidFill>
-                <a:latin typeface="Cambria"/>
-              </a:rPr>
-              <a:t>[5]  Neo4j. Graph algorithms for fraud detection — developer guide. neo4j.com.</a:t>
-            </a:r>
-          </a:p>
-          <a:p>
-            <a:pPr>
-              <a:spcAft>
-                <a:spcPts val="700"/>
-              </a:spcAft>
-            </a:pPr>
-            <a:r>
-              <a:rPr sz="1300" b="0">
-                <a:solidFill>
-                  <a:srgbClr val="222833"/>
-                </a:solidFill>
-                <a:latin typeface="Cambria"/>
-              </a:rPr>
-              <a:t>[6]  LangChain &amp; ChromaDB documentation — retrieval-augmented generation.</a:t>
-            </a:r>
-          </a:p>
-        </p:txBody>
-      </p:sp>
-    </p:spTree>
-  </p:cSld>
-  <p:clrMapOvr>
-    <a:masterClrMapping/>
-  </p:clrMapOvr>
-</p:sld>
-</file>
-
-<file path=ppt/slides/slide25.xml><?xml version="1.0" encoding="utf-8"?>
+<file path=ppt/slides/slide23.xml><?xml version="1.0" encoding="utf-8"?>
 <p:sld xmlns:a="http://schemas.openxmlformats.org/drawingml/2006/main" xmlns:r="http://schemas.openxmlformats.org/officeDocument/2006/relationships" xmlns:p="http://schemas.openxmlformats.org/presentationml/2006/main">
   <p:cSld>
     <p:spTree>
@@ -10900,7 +10546,7 @@
 </p:sld>
 </file>
 
-<file path=ppt/slides/slide26.xml><?xml version="1.0" encoding="utf-8"?>
+<file path=ppt/slides/slide24.xml><?xml version="1.0" encoding="utf-8"?>
 <p:sld xmlns:a="http://schemas.openxmlformats.org/drawingml/2006/main" xmlns:r="http://schemas.openxmlformats.org/officeDocument/2006/relationships" xmlns:p="http://schemas.openxmlformats.org/presentationml/2006/main">
   <p:cSld>
     <p:spTree>
